--- a/data/outputs/v2/Physics/SS2.1_Properties_of_Waves/quiz/Physics_G10_SS2.1_Properties_of_Waves_L1_QuickCheck.pptx
+++ b/data/outputs/v2/Physics/SS2.1_Properties_of_Waves/quiz/Physics_G10_SS2.1_Properties_of_Waves_L1_QuickCheck.pptx
@@ -14,11 +14,9 @@
     <p:sldId id="262" r:id="rId8"/>
     <p:sldId id="263" r:id="rId9"/>
     <p:sldId id="264" r:id="rId10"/>
-    <p:sldId id="265" r:id="rId11"/>
-    <p:sldId id="266" r:id="rId12"/>
   </p:sldIdLst>
   <p:notesMasterIdLst>
-    <p:notesMasterId r:id="rId13"/>
+    <p:notesMasterId r:id="rId11"/>
   </p:notesMasterIdLst>
   <p:sldSz cx="12192000" cy="6858000"/>
   <p:notesSz cx="6858000" cy="12192000"/>
@@ -536,182 +534,6 @@
             <a:fld id="{F7021451-1387-4CA6-816F-3879F97B5CBC}" type="slidenum">
               <a:rPr lang="en-US"/>
               <a:t>1</a:t>
-            </a:fld>
-            <a:endParaRPr lang="en-US"/>
-          </a:p>
-        </p:txBody>
-      </p:sp>
-    </p:spTree>
-    <p:extLst>
-      <p:ext uri="{BB962C8B-B14F-4D97-AF65-F5344CB8AC3E}">
-        <p14:creationId xmlns:p14="http://schemas.microsoft.com/office/powerpoint/2010/main" val="1024086991"/>
-      </p:ext>
-    </p:extLst>
-  </p:cSld>
-  <p:clrMapOvr>
-    <a:masterClrMapping/>
-  </p:clrMapOvr>
-</p:notes>
-</file>
-
-<file path=ppt/notesSlides/notesSlide10.xml><?xml version="1.0" encoding="utf-8"?>
-<p:notes xmlns:a="http://schemas.openxmlformats.org/drawingml/2006/main" xmlns:r="http://schemas.openxmlformats.org/officeDocument/2006/relationships" xmlns:p="http://schemas.openxmlformats.org/presentationml/2006/main">
-  <p:cSld>
-    <p:spTree>
-      <p:nvGrpSpPr>
-        <p:cNvPr id="1" name=""/>
-        <p:cNvGrpSpPr/>
-        <p:nvPr/>
-      </p:nvGrpSpPr>
-      <p:grpSpPr>
-        <a:xfrm>
-          <a:off x="0" y="0"/>
-          <a:ext cx="0" cy="0"/>
-          <a:chOff x="0" y="0"/>
-          <a:chExt cx="0" cy="0"/>
-        </a:xfrm>
-      </p:grpSpPr>
-      <p:sp>
-        <p:nvSpPr>
-          <p:cNvPr id="2" name="Slide Image Placeholder 1"/>
-          <p:cNvSpPr>
-            <a:spLocks noGrp="1" noRot="1" noChangeAspect="1"/>
-          </p:cNvSpPr>
-          <p:nvPr>
-            <p:ph type="sldImg"/>
-          </p:nvPr>
-        </p:nvSpPr>
-        <p:spPr/>
-      </p:sp>
-      <p:sp>
-        <p:nvSpPr>
-          <p:cNvPr id="3" name="Notes Placeholder 2"/>
-          <p:cNvSpPr>
-            <a:spLocks noGrp="1"/>
-          </p:cNvSpPr>
-          <p:nvPr>
-            <p:ph type="body" idx="1"/>
-          </p:nvPr>
-        </p:nvSpPr>
-        <p:spPr/>
-        <p:txBody>
-          <a:bodyPr/>
-          <a:lstStyle/>
-          <a:p>
-            <a:r>
-              <a:rPr lang="en-US" dirty="0"/>
-              <a:t/>
-            </a:r>
-            <a:endParaRPr lang="en-US" dirty="0"/>
-          </a:p>
-        </p:txBody>
-      </p:sp>
-      <p:sp>
-        <p:nvSpPr>
-          <p:cNvPr id="4" name="Slide Number Placeholder 3"/>
-          <p:cNvSpPr>
-            <a:spLocks noGrp="1"/>
-          </p:cNvSpPr>
-          <p:nvPr>
-            <p:ph type="sldNum" sz="quarter" idx="10"/>
-          </p:nvPr>
-        </p:nvSpPr>
-        <p:spPr/>
-        <p:txBody>
-          <a:bodyPr/>
-          <a:lstStyle/>
-          <a:p>
-            <a:fld id="{F7021451-1387-4CA6-816F-3879F97B5CBC}" type="slidenum">
-              <a:rPr lang="en-US"/>
-              <a:t>10</a:t>
-            </a:fld>
-            <a:endParaRPr lang="en-US"/>
-          </a:p>
-        </p:txBody>
-      </p:sp>
-    </p:spTree>
-    <p:extLst>
-      <p:ext uri="{BB962C8B-B14F-4D97-AF65-F5344CB8AC3E}">
-        <p14:creationId xmlns:p14="http://schemas.microsoft.com/office/powerpoint/2010/main" val="1024086991"/>
-      </p:ext>
-    </p:extLst>
-  </p:cSld>
-  <p:clrMapOvr>
-    <a:masterClrMapping/>
-  </p:clrMapOvr>
-</p:notes>
-</file>
-
-<file path=ppt/notesSlides/notesSlide11.xml><?xml version="1.0" encoding="utf-8"?>
-<p:notes xmlns:a="http://schemas.openxmlformats.org/drawingml/2006/main" xmlns:r="http://schemas.openxmlformats.org/officeDocument/2006/relationships" xmlns:p="http://schemas.openxmlformats.org/presentationml/2006/main">
-  <p:cSld>
-    <p:spTree>
-      <p:nvGrpSpPr>
-        <p:cNvPr id="1" name=""/>
-        <p:cNvGrpSpPr/>
-        <p:nvPr/>
-      </p:nvGrpSpPr>
-      <p:grpSpPr>
-        <a:xfrm>
-          <a:off x="0" y="0"/>
-          <a:ext cx="0" cy="0"/>
-          <a:chOff x="0" y="0"/>
-          <a:chExt cx="0" cy="0"/>
-        </a:xfrm>
-      </p:grpSpPr>
-      <p:sp>
-        <p:nvSpPr>
-          <p:cNvPr id="2" name="Slide Image Placeholder 1"/>
-          <p:cNvSpPr>
-            <a:spLocks noGrp="1" noRot="1" noChangeAspect="1"/>
-          </p:cNvSpPr>
-          <p:nvPr>
-            <p:ph type="sldImg"/>
-          </p:nvPr>
-        </p:nvSpPr>
-        <p:spPr/>
-      </p:sp>
-      <p:sp>
-        <p:nvSpPr>
-          <p:cNvPr id="3" name="Notes Placeholder 2"/>
-          <p:cNvSpPr>
-            <a:spLocks noGrp="1"/>
-          </p:cNvSpPr>
-          <p:nvPr>
-            <p:ph type="body" idx="1"/>
-          </p:nvPr>
-        </p:nvSpPr>
-        <p:spPr/>
-        <p:txBody>
-          <a:bodyPr/>
-          <a:lstStyle/>
-          <a:p>
-            <a:r>
-              <a:rPr lang="en-US" dirty="0"/>
-              <a:t/>
-            </a:r>
-            <a:endParaRPr lang="en-US" dirty="0"/>
-          </a:p>
-        </p:txBody>
-      </p:sp>
-      <p:sp>
-        <p:nvSpPr>
-          <p:cNvPr id="4" name="Slide Number Placeholder 3"/>
-          <p:cNvSpPr>
-            <a:spLocks noGrp="1"/>
-          </p:cNvSpPr>
-          <p:nvPr>
-            <p:ph type="sldNum" sz="quarter" idx="10"/>
-          </p:nvPr>
-        </p:nvSpPr>
-        <p:spPr/>
-        <p:txBody>
-          <a:bodyPr/>
-          <a:lstStyle/>
-          <a:p>
-            <a:fld id="{F7021451-1387-4CA6-816F-3879F97B5CBC}" type="slidenum">
-              <a:rPr lang="en-US"/>
-              <a:t>11</a:t>
             </a:fld>
             <a:endParaRPr lang="en-US"/>
           </a:p>
@@ -1915,7 +1737,7 @@
                 <a:ea typeface="Arial" pitchFamily="34" charset="-122"/>
                 <a:cs typeface="Arial" pitchFamily="34" charset="-120"/>
               </a:rPr>
-              <a:t>9 multiple-choice questions  •  choose A, B, C or D</a:t>
+              <a:t>7 multiple-choice questions  •  choose A, B, C or D</a:t>
             </a:r>
             <a:endParaRPr lang="en-US" sz="1600" dirty="0"/>
           </a:p>
@@ -2031,726 +1853,6 @@
               <a:t> (https://creativecommons.org/licenses/by-nc/4.0/).</a:t>
             </a:r>
             <a:endParaRPr lang="en-US" sz="900" dirty="0"/>
-          </a:p>
-        </p:txBody>
-      </p:sp>
-    </p:spTree>
-  </p:cSld>
-  <p:clrMapOvr>
-    <a:masterClrMapping/>
-  </p:clrMapOvr>
-</p:sld>
-</file>
-
-<file path=ppt/slides/slide10.xml><?xml version="1.0" encoding="utf-8"?>
-<p:sld xmlns:a="http://schemas.openxmlformats.org/drawingml/2006/main" xmlns:r="http://schemas.openxmlformats.org/officeDocument/2006/relationships" xmlns:p="http://schemas.openxmlformats.org/presentationml/2006/main">
-  <p:cSld name="Slide 10">
-    <p:bg>
-      <p:bgPr>
-        <a:solidFill>
-          <a:srgbClr val="6A4C93"/>
-        </a:solidFill>
-      </p:bgPr>
-    </p:bg>
-    <p:spTree>
-      <p:nvGrpSpPr>
-        <p:cNvPr id="1" name=""/>
-        <p:cNvGrpSpPr/>
-        <p:nvPr/>
-      </p:nvGrpSpPr>
-      <p:grpSpPr>
-        <a:xfrm>
-          <a:off x="0" y="0"/>
-          <a:ext cx="0" cy="0"/>
-          <a:chOff x="0" y="0"/>
-          <a:chExt cx="0" cy="0"/>
-        </a:xfrm>
-      </p:grpSpPr>
-      <p:sp>
-        <p:nvSpPr>
-          <p:cNvPr id="2" name="Text 0"/>
-          <p:cNvSpPr/>
-          <p:nvPr/>
-        </p:nvSpPr>
-        <p:spPr>
-          <a:xfrm>
-            <a:off x="548640" y="365760"/>
-            <a:ext cx="6400800" cy="365760"/>
-          </a:xfrm>
-          <a:prstGeom prst="rect">
-            <a:avLst/>
-          </a:prstGeom>
-          <a:noFill/>
-          <a:ln/>
-        </p:spPr>
-        <p:txBody>
-          <a:bodyPr wrap="square" lIns="0" tIns="0" rIns="0" bIns="0" rtlCol="0" anchor="ctr"/>
-          <a:lstStyle/>
-          <a:p>
-            <a:pPr indent="0" marL="0">
-              <a:buNone/>
-            </a:pPr>
-            <a:r>
-              <a:rPr lang="en-US" sz="1300" b="1" spc="200" kern="0" dirty="0">
-                <a:solidFill>
-                  <a:srgbClr val="E0D6F0"/>
-                </a:solidFill>
-                <a:latin typeface="Arial" pitchFamily="34" charset="0"/>
-                <a:ea typeface="Arial" pitchFamily="34" charset="-122"/>
-                <a:cs typeface="Arial" pitchFamily="34" charset="-120"/>
-              </a:rPr>
-              <a:t>QUESTION 9 OF 9</a:t>
-            </a:r>
-            <a:endParaRPr lang="en-US" sz="1300" dirty="0"/>
-          </a:p>
-        </p:txBody>
-      </p:sp>
-      <p:sp>
-        <p:nvSpPr>
-          <p:cNvPr id="3" name="Shape 1"/>
-          <p:cNvSpPr/>
-          <p:nvPr/>
-        </p:nvSpPr>
-        <p:spPr>
-          <a:xfrm>
-            <a:off x="8138160" y="320040"/>
-            <a:ext cx="3474720" cy="365760"/>
-          </a:xfrm>
-          <a:prstGeom prst="roundRect">
-            <a:avLst>
-              <a:gd name="adj" fmla="val 15000"/>
-            </a:avLst>
-          </a:prstGeom>
-          <a:solidFill>
-            <a:srgbClr val="5A3F80"/>
-          </a:solidFill>
-          <a:ln/>
-        </p:spPr>
-      </p:sp>
-      <p:sp>
-        <p:nvSpPr>
-          <p:cNvPr id="4" name="Text 2"/>
-          <p:cNvSpPr/>
-          <p:nvPr/>
-        </p:nvSpPr>
-        <p:spPr>
-          <a:xfrm>
-            <a:off x="8138160" y="320040"/>
-            <a:ext cx="3474720" cy="365760"/>
-          </a:xfrm>
-          <a:prstGeom prst="rect">
-            <a:avLst/>
-          </a:prstGeom>
-          <a:noFill/>
-          <a:ln/>
-        </p:spPr>
-        <p:txBody>
-          <a:bodyPr wrap="square" lIns="0" tIns="0" rIns="0" bIns="0" rtlCol="0" anchor="ctr"/>
-          <a:lstStyle/>
-          <a:p>
-            <a:pPr algn="ctr" indent="0" marL="0">
-              <a:buNone/>
-            </a:pPr>
-            <a:r>
-              <a:rPr lang="en-US" sz="1100" i="1" dirty="0">
-                <a:solidFill>
-                  <a:srgbClr val="E0D6F0"/>
-                </a:solidFill>
-                <a:latin typeface="Arial" pitchFamily="34" charset="0"/>
-                <a:ea typeface="Arial" pitchFamily="34" charset="-122"/>
-                <a:cs typeface="Arial" pitchFamily="34" charset="-120"/>
-              </a:rPr>
-              <a:t>Use after: End of lesson</a:t>
-            </a:r>
-            <a:endParaRPr lang="en-US" sz="1100" dirty="0"/>
-          </a:p>
-        </p:txBody>
-      </p:sp>
-      <p:sp>
-        <p:nvSpPr>
-          <p:cNvPr id="5" name="Text 3"/>
-          <p:cNvSpPr/>
-          <p:nvPr/>
-        </p:nvSpPr>
-        <p:spPr>
-          <a:xfrm>
-            <a:off x="548640" y="868680"/>
-            <a:ext cx="11064240" cy="1325880"/>
-          </a:xfrm>
-          <a:prstGeom prst="rect">
-            <a:avLst/>
-          </a:prstGeom>
-          <a:noFill/>
-          <a:ln/>
-        </p:spPr>
-        <p:txBody>
-          <a:bodyPr wrap="square" lIns="0" tIns="0" rIns="0" bIns="0" rtlCol="0" anchor="ctr"/>
-          <a:lstStyle/>
-          <a:p>
-            <a:pPr indent="0" marL="0">
-              <a:buNone/>
-            </a:pPr>
-            <a:r>
-              <a:rPr lang="en-US" sz="1800" b="1" dirty="0">
-                <a:solidFill>
-                  <a:srgbClr val="FFFFFF"/>
-                </a:solidFill>
-                <a:latin typeface="Arial" pitchFamily="34" charset="0"/>
-                <a:ea typeface="Arial" pitchFamily="34" charset="-122"/>
-                <a:cs typeface="Arial" pitchFamily="34" charset="-120"/>
-              </a:rPr>
-              <a:t>At the end of this first lesson, your class has noticed patterns and posted questions about the matatu horn and the Kabete tunnel. What is the status of the driving question 'Why does the horn change pitch, and why does FM fade in the tunnel?'</a:t>
-            </a:r>
-            <a:endParaRPr lang="en-US" sz="1800" dirty="0"/>
-          </a:p>
-        </p:txBody>
-      </p:sp>
-      <p:sp>
-        <p:nvSpPr>
-          <p:cNvPr id="6" name="Shape 4"/>
-          <p:cNvSpPr/>
-          <p:nvPr/>
-        </p:nvSpPr>
-        <p:spPr>
-          <a:xfrm>
-            <a:off x="731520" y="2331720"/>
-            <a:ext cx="10698480" cy="777240"/>
-          </a:xfrm>
-          <a:prstGeom prst="roundRect">
-            <a:avLst>
-              <a:gd name="adj" fmla="val 9412"/>
-            </a:avLst>
-          </a:prstGeom>
-          <a:solidFill>
-            <a:srgbClr val="7C5CAA"/>
-          </a:solidFill>
-          <a:ln/>
-        </p:spPr>
-      </p:sp>
-      <p:sp>
-        <p:nvSpPr>
-          <p:cNvPr id="7" name="Text 5"/>
-          <p:cNvSpPr/>
-          <p:nvPr/>
-        </p:nvSpPr>
-        <p:spPr>
-          <a:xfrm>
-            <a:off x="914400" y="2331720"/>
-            <a:ext cx="548640" cy="777240"/>
-          </a:xfrm>
-          <a:prstGeom prst="rect">
-            <a:avLst/>
-          </a:prstGeom>
-          <a:noFill/>
-          <a:ln/>
-        </p:spPr>
-        <p:txBody>
-          <a:bodyPr wrap="square" lIns="0" tIns="0" rIns="0" bIns="0" rtlCol="0" anchor="ctr"/>
-          <a:lstStyle/>
-          <a:p>
-            <a:pPr indent="0" marL="0">
-              <a:buNone/>
-            </a:pPr>
-            <a:r>
-              <a:rPr lang="en-US" sz="1800" b="1" dirty="0">
-                <a:solidFill>
-                  <a:srgbClr val="FFFFFF"/>
-                </a:solidFill>
-                <a:latin typeface="Arial" pitchFamily="34" charset="0"/>
-                <a:ea typeface="Arial" pitchFamily="34" charset="-122"/>
-                <a:cs typeface="Arial" pitchFamily="34" charset="-120"/>
-              </a:rPr>
-              <a:t>A</a:t>
-            </a:r>
-            <a:endParaRPr lang="en-US" sz="1800" dirty="0"/>
-          </a:p>
-        </p:txBody>
-      </p:sp>
-      <p:sp>
-        <p:nvSpPr>
-          <p:cNvPr id="8" name="Text 6"/>
-          <p:cNvSpPr/>
-          <p:nvPr/>
-        </p:nvSpPr>
-        <p:spPr>
-          <a:xfrm>
-            <a:off x="1554480" y="2331720"/>
-            <a:ext cx="9692640" cy="777240"/>
-          </a:xfrm>
-          <a:prstGeom prst="rect">
-            <a:avLst/>
-          </a:prstGeom>
-          <a:noFill/>
-          <a:ln/>
-        </p:spPr>
-        <p:txBody>
-          <a:bodyPr wrap="square" lIns="0" tIns="0" rIns="0" bIns="0" rtlCol="0" anchor="ctr"/>
-          <a:lstStyle/>
-          <a:p>
-            <a:pPr indent="0" marL="0">
-              <a:buNone/>
-            </a:pPr>
-            <a:r>
-              <a:rPr lang="en-US" sz="1500" dirty="0">
-                <a:solidFill>
-                  <a:srgbClr val="FFFFFF"/>
-                </a:solidFill>
-                <a:latin typeface="Arial" pitchFamily="34" charset="0"/>
-                <a:ea typeface="Arial" pitchFamily="34" charset="-122"/>
-                <a:cs typeface="Arial" pitchFamily="34" charset="-120"/>
-              </a:rPr>
-              <a:t>It is answered because the PhET simulation showed the pitch change.</a:t>
-            </a:r>
-            <a:endParaRPr lang="en-US" sz="1500" dirty="0"/>
-          </a:p>
-        </p:txBody>
-      </p:sp>
-      <p:sp>
-        <p:nvSpPr>
-          <p:cNvPr id="9" name="Shape 7"/>
-          <p:cNvSpPr/>
-          <p:nvPr/>
-        </p:nvSpPr>
-        <p:spPr>
-          <a:xfrm>
-            <a:off x="731520" y="3246120"/>
-            <a:ext cx="10698480" cy="777240"/>
-          </a:xfrm>
-          <a:prstGeom prst="roundRect">
-            <a:avLst>
-              <a:gd name="adj" fmla="val 9412"/>
-            </a:avLst>
-          </a:prstGeom>
-          <a:solidFill>
-            <a:srgbClr val="7C5CAA"/>
-          </a:solidFill>
-          <a:ln/>
-        </p:spPr>
-      </p:sp>
-      <p:sp>
-        <p:nvSpPr>
-          <p:cNvPr id="10" name="Text 8"/>
-          <p:cNvSpPr/>
-          <p:nvPr/>
-        </p:nvSpPr>
-        <p:spPr>
-          <a:xfrm>
-            <a:off x="914400" y="3246120"/>
-            <a:ext cx="548640" cy="777240"/>
-          </a:xfrm>
-          <a:prstGeom prst="rect">
-            <a:avLst/>
-          </a:prstGeom>
-          <a:noFill/>
-          <a:ln/>
-        </p:spPr>
-        <p:txBody>
-          <a:bodyPr wrap="square" lIns="0" tIns="0" rIns="0" bIns="0" rtlCol="0" anchor="ctr"/>
-          <a:lstStyle/>
-          <a:p>
-            <a:pPr indent="0" marL="0">
-              <a:buNone/>
-            </a:pPr>
-            <a:r>
-              <a:rPr lang="en-US" sz="1800" b="1" dirty="0">
-                <a:solidFill>
-                  <a:srgbClr val="FFFFFF"/>
-                </a:solidFill>
-                <a:latin typeface="Arial" pitchFamily="34" charset="0"/>
-                <a:ea typeface="Arial" pitchFamily="34" charset="-122"/>
-                <a:cs typeface="Arial" pitchFamily="34" charset="-120"/>
-              </a:rPr>
-              <a:t>B</a:t>
-            </a:r>
-            <a:endParaRPr lang="en-US" sz="1800" dirty="0"/>
-          </a:p>
-        </p:txBody>
-      </p:sp>
-      <p:sp>
-        <p:nvSpPr>
-          <p:cNvPr id="11" name="Text 9"/>
-          <p:cNvSpPr/>
-          <p:nvPr/>
-        </p:nvSpPr>
-        <p:spPr>
-          <a:xfrm>
-            <a:off x="1554480" y="3246120"/>
-            <a:ext cx="9692640" cy="777240"/>
-          </a:xfrm>
-          <a:prstGeom prst="rect">
-            <a:avLst/>
-          </a:prstGeom>
-          <a:noFill/>
-          <a:ln/>
-        </p:spPr>
-        <p:txBody>
-          <a:bodyPr wrap="square" lIns="0" tIns="0" rIns="0" bIns="0" rtlCol="0" anchor="ctr"/>
-          <a:lstStyle/>
-          <a:p>
-            <a:pPr indent="0" marL="0">
-              <a:buNone/>
-            </a:pPr>
-            <a:r>
-              <a:rPr lang="en-US" sz="1500" dirty="0">
-                <a:solidFill>
-                  <a:srgbClr val="FFFFFF"/>
-                </a:solidFill>
-                <a:latin typeface="Arial" pitchFamily="34" charset="0"/>
-                <a:ea typeface="Arial" pitchFamily="34" charset="-122"/>
-                <a:cs typeface="Arial" pitchFamily="34" charset="-120"/>
-              </a:rPr>
-              <a:t>It is fully answered because the class voted on the best explanation.</a:t>
-            </a:r>
-            <a:endParaRPr lang="en-US" sz="1500" dirty="0"/>
-          </a:p>
-        </p:txBody>
-      </p:sp>
-      <p:sp>
-        <p:nvSpPr>
-          <p:cNvPr id="12" name="Shape 10"/>
-          <p:cNvSpPr/>
-          <p:nvPr/>
-        </p:nvSpPr>
-        <p:spPr>
-          <a:xfrm>
-            <a:off x="731520" y="4160520"/>
-            <a:ext cx="10698480" cy="777240"/>
-          </a:xfrm>
-          <a:prstGeom prst="roundRect">
-            <a:avLst>
-              <a:gd name="adj" fmla="val 9412"/>
-            </a:avLst>
-          </a:prstGeom>
-          <a:solidFill>
-            <a:srgbClr val="7C5CAA"/>
-          </a:solidFill>
-          <a:ln/>
-        </p:spPr>
-      </p:sp>
-      <p:sp>
-        <p:nvSpPr>
-          <p:cNvPr id="13" name="Text 11"/>
-          <p:cNvSpPr/>
-          <p:nvPr/>
-        </p:nvSpPr>
-        <p:spPr>
-          <a:xfrm>
-            <a:off x="914400" y="4160520"/>
-            <a:ext cx="548640" cy="777240"/>
-          </a:xfrm>
-          <a:prstGeom prst="rect">
-            <a:avLst/>
-          </a:prstGeom>
-          <a:noFill/>
-          <a:ln/>
-        </p:spPr>
-        <p:txBody>
-          <a:bodyPr wrap="square" lIns="0" tIns="0" rIns="0" bIns="0" rtlCol="0" anchor="ctr"/>
-          <a:lstStyle/>
-          <a:p>
-            <a:pPr indent="0" marL="0">
-              <a:buNone/>
-            </a:pPr>
-            <a:r>
-              <a:rPr lang="en-US" sz="1800" b="1" dirty="0">
-                <a:solidFill>
-                  <a:srgbClr val="FFFFFF"/>
-                </a:solidFill>
-                <a:latin typeface="Arial" pitchFamily="34" charset="0"/>
-                <a:ea typeface="Arial" pitchFamily="34" charset="-122"/>
-                <a:cs typeface="Arial" pitchFamily="34" charset="-120"/>
-              </a:rPr>
-              <a:t>C</a:t>
-            </a:r>
-            <a:endParaRPr lang="en-US" sz="1800" dirty="0"/>
-          </a:p>
-        </p:txBody>
-      </p:sp>
-      <p:sp>
-        <p:nvSpPr>
-          <p:cNvPr id="14" name="Text 12"/>
-          <p:cNvSpPr/>
-          <p:nvPr/>
-        </p:nvSpPr>
-        <p:spPr>
-          <a:xfrm>
-            <a:off x="1554480" y="4160520"/>
-            <a:ext cx="9692640" cy="777240"/>
-          </a:xfrm>
-          <a:prstGeom prst="rect">
-            <a:avLst/>
-          </a:prstGeom>
-          <a:noFill/>
-          <a:ln/>
-        </p:spPr>
-        <p:txBody>
-          <a:bodyPr wrap="square" lIns="0" tIns="0" rIns="0" bIns="0" rtlCol="0" anchor="ctr"/>
-          <a:lstStyle/>
-          <a:p>
-            <a:pPr indent="0" marL="0">
-              <a:buNone/>
-            </a:pPr>
-            <a:r>
-              <a:rPr lang="en-US" sz="1500" dirty="0">
-                <a:solidFill>
-                  <a:srgbClr val="FFFFFF"/>
-                </a:solidFill>
-                <a:latin typeface="Arial" pitchFamily="34" charset="0"/>
-                <a:ea typeface="Arial" pitchFamily="34" charset="-122"/>
-                <a:cs typeface="Arial" pitchFamily="34" charset="-120"/>
-              </a:rPr>
-              <a:t>It is still open: the class has observations and first ideas, and will gather more evidence in later lessons.</a:t>
-            </a:r>
-            <a:endParaRPr lang="en-US" sz="1500" dirty="0"/>
-          </a:p>
-        </p:txBody>
-      </p:sp>
-      <p:sp>
-        <p:nvSpPr>
-          <p:cNvPr id="15" name="Shape 13"/>
-          <p:cNvSpPr/>
-          <p:nvPr/>
-        </p:nvSpPr>
-        <p:spPr>
-          <a:xfrm>
-            <a:off x="731520" y="5074920"/>
-            <a:ext cx="10698480" cy="777240"/>
-          </a:xfrm>
-          <a:prstGeom prst="roundRect">
-            <a:avLst>
-              <a:gd name="adj" fmla="val 9412"/>
-            </a:avLst>
-          </a:prstGeom>
-          <a:solidFill>
-            <a:srgbClr val="7C5CAA"/>
-          </a:solidFill>
-          <a:ln/>
-        </p:spPr>
-      </p:sp>
-      <p:sp>
-        <p:nvSpPr>
-          <p:cNvPr id="16" name="Text 14"/>
-          <p:cNvSpPr/>
-          <p:nvPr/>
-        </p:nvSpPr>
-        <p:spPr>
-          <a:xfrm>
-            <a:off x="914400" y="5074920"/>
-            <a:ext cx="548640" cy="777240"/>
-          </a:xfrm>
-          <a:prstGeom prst="rect">
-            <a:avLst/>
-          </a:prstGeom>
-          <a:noFill/>
-          <a:ln/>
-        </p:spPr>
-        <p:txBody>
-          <a:bodyPr wrap="square" lIns="0" tIns="0" rIns="0" bIns="0" rtlCol="0" anchor="ctr"/>
-          <a:lstStyle/>
-          <a:p>
-            <a:pPr indent="0" marL="0">
-              <a:buNone/>
-            </a:pPr>
-            <a:r>
-              <a:rPr lang="en-US" sz="1800" b="1" dirty="0">
-                <a:solidFill>
-                  <a:srgbClr val="FFFFFF"/>
-                </a:solidFill>
-                <a:latin typeface="Arial" pitchFamily="34" charset="0"/>
-                <a:ea typeface="Arial" pitchFamily="34" charset="-122"/>
-                <a:cs typeface="Arial" pitchFamily="34" charset="-120"/>
-              </a:rPr>
-              <a:t>D</a:t>
-            </a:r>
-            <a:endParaRPr lang="en-US" sz="1800" dirty="0"/>
-          </a:p>
-        </p:txBody>
-      </p:sp>
-      <p:sp>
-        <p:nvSpPr>
-          <p:cNvPr id="17" name="Text 15"/>
-          <p:cNvSpPr/>
-          <p:nvPr/>
-        </p:nvSpPr>
-        <p:spPr>
-          <a:xfrm>
-            <a:off x="1554480" y="5074920"/>
-            <a:ext cx="9692640" cy="777240"/>
-          </a:xfrm>
-          <a:prstGeom prst="rect">
-            <a:avLst/>
-          </a:prstGeom>
-          <a:noFill/>
-          <a:ln/>
-        </p:spPr>
-        <p:txBody>
-          <a:bodyPr wrap="square" lIns="0" tIns="0" rIns="0" bIns="0" rtlCol="0" anchor="ctr"/>
-          <a:lstStyle/>
-          <a:p>
-            <a:pPr indent="0" marL="0">
-              <a:buNone/>
-            </a:pPr>
-            <a:r>
-              <a:rPr lang="en-US" sz="1500" dirty="0">
-                <a:solidFill>
-                  <a:srgbClr val="FFFFFF"/>
-                </a:solidFill>
-                <a:latin typeface="Arial" pitchFamily="34" charset="0"/>
-                <a:ea typeface="Arial" pitchFamily="34" charset="-122"/>
-                <a:cs typeface="Arial" pitchFamily="34" charset="-120"/>
-              </a:rPr>
-              <a:t>It is answered because the diagram shows the FM wavelength and the tunnel width.</a:t>
-            </a:r>
-            <a:endParaRPr lang="en-US" sz="1500" dirty="0"/>
-          </a:p>
-        </p:txBody>
-      </p:sp>
-      <p:sp>
-        <p:nvSpPr>
-          <p:cNvPr id="18" name="Text 16"/>
-          <p:cNvSpPr/>
-          <p:nvPr/>
-        </p:nvSpPr>
-        <p:spPr>
-          <a:xfrm>
-            <a:off x="11521440" y="6446520"/>
-            <a:ext cx="457200" cy="274320"/>
-          </a:xfrm>
-          <a:prstGeom prst="rect">
-            <a:avLst/>
-          </a:prstGeom>
-          <a:noFill/>
-          <a:ln/>
-        </p:spPr>
-        <p:txBody>
-          <a:bodyPr wrap="square" lIns="0" tIns="0" rIns="0" bIns="0" rtlCol="0" anchor="ctr"/>
-          <a:lstStyle/>
-          <a:p>
-            <a:pPr algn="r" indent="0" marL="0">
-              <a:buNone/>
-            </a:pPr>
-            <a:r>
-              <a:rPr lang="en-US" sz="1000" dirty="0">
-                <a:solidFill>
-                  <a:srgbClr val="C9B8E0"/>
-                </a:solidFill>
-                <a:latin typeface="Arial" pitchFamily="34" charset="0"/>
-                <a:ea typeface="Arial" pitchFamily="34" charset="-122"/>
-                <a:cs typeface="Arial" pitchFamily="34" charset="-120"/>
-              </a:rPr>
-              <a:t>10</a:t>
-            </a:r>
-            <a:endParaRPr lang="en-US" sz="1000" dirty="0"/>
-          </a:p>
-        </p:txBody>
-      </p:sp>
-    </p:spTree>
-  </p:cSld>
-  <p:clrMapOvr>
-    <a:masterClrMapping/>
-  </p:clrMapOvr>
-</p:sld>
-</file>
-
-<file path=ppt/slides/slide11.xml><?xml version="1.0" encoding="utf-8"?>
-<p:sld xmlns:a="http://schemas.openxmlformats.org/drawingml/2006/main" xmlns:r="http://schemas.openxmlformats.org/officeDocument/2006/relationships" xmlns:p="http://schemas.openxmlformats.org/presentationml/2006/main">
-  <p:cSld name="Slide 11">
-    <p:bg>
-      <p:bgPr>
-        <a:solidFill>
-          <a:srgbClr val="1F3864"/>
-        </a:solidFill>
-      </p:bgPr>
-    </p:bg>
-    <p:spTree>
-      <p:nvGrpSpPr>
-        <p:cNvPr id="1" name=""/>
-        <p:cNvGrpSpPr/>
-        <p:nvPr/>
-      </p:nvGrpSpPr>
-      <p:grpSpPr>
-        <a:xfrm>
-          <a:off x="0" y="0"/>
-          <a:ext cx="0" cy="0"/>
-          <a:chOff x="0" y="0"/>
-          <a:chExt cx="0" cy="0"/>
-        </a:xfrm>
-      </p:grpSpPr>
-      <p:sp>
-        <p:nvSpPr>
-          <p:cNvPr id="2" name="Text 0"/>
-          <p:cNvSpPr/>
-          <p:nvPr/>
-        </p:nvSpPr>
-        <p:spPr>
-          <a:xfrm>
-            <a:off x="731520" y="2194560"/>
-            <a:ext cx="10698480" cy="822960"/>
-          </a:xfrm>
-          <a:prstGeom prst="rect">
-            <a:avLst/>
-          </a:prstGeom>
-          <a:noFill/>
-          <a:ln/>
-        </p:spPr>
-        <p:txBody>
-          <a:bodyPr wrap="square" lIns="0" tIns="0" rIns="0" bIns="0" rtlCol="0" anchor="ctr"/>
-          <a:lstStyle/>
-          <a:p>
-            <a:pPr indent="0" marL="0">
-              <a:buNone/>
-            </a:pPr>
-            <a:r>
-              <a:rPr lang="en-US" sz="3400" b="1" dirty="0">
-                <a:solidFill>
-                  <a:srgbClr val="FFFFFF"/>
-                </a:solidFill>
-                <a:latin typeface="Arial" pitchFamily="34" charset="0"/>
-                <a:ea typeface="Arial" pitchFamily="34" charset="-122"/>
-                <a:cs typeface="Arial" pitchFamily="34" charset="-120"/>
-              </a:rPr>
-              <a:t>All done</a:t>
-            </a:r>
-            <a:endParaRPr lang="en-US" sz="3400" dirty="0"/>
-          </a:p>
-        </p:txBody>
-      </p:sp>
-      <p:sp>
-        <p:nvSpPr>
-          <p:cNvPr id="3" name="Text 1"/>
-          <p:cNvSpPr/>
-          <p:nvPr/>
-        </p:nvSpPr>
-        <p:spPr>
-          <a:xfrm>
-            <a:off x="731520" y="3108960"/>
-            <a:ext cx="10698480" cy="731520"/>
-          </a:xfrm>
-          <a:prstGeom prst="rect">
-            <a:avLst/>
-          </a:prstGeom>
-          <a:noFill/>
-          <a:ln/>
-        </p:spPr>
-        <p:txBody>
-          <a:bodyPr wrap="square" lIns="0" tIns="0" rIns="0" bIns="0" rtlCol="0" anchor="ctr"/>
-          <a:lstStyle/>
-          <a:p>
-            <a:pPr indent="0" marL="0">
-              <a:buNone/>
-            </a:pPr>
-            <a:r>
-              <a:rPr lang="en-US" sz="1800" dirty="0">
-                <a:solidFill>
-                  <a:srgbClr val="D9EEF1"/>
-                </a:solidFill>
-                <a:latin typeface="Arial" pitchFamily="34" charset="0"/>
-                <a:ea typeface="Arial" pitchFamily="34" charset="-122"/>
-                <a:cs typeface="Arial" pitchFamily="34" charset="-120"/>
-              </a:rPr>
-              <a:t>Ask your teacher how to submit your answers today (for example, on a paper answer slip).</a:t>
-            </a:r>
-            <a:endParaRPr lang="en-US" sz="1800" dirty="0"/>
           </a:p>
         </p:txBody>
       </p:sp>
@@ -2819,7 +1921,7 @@
                 <a:ea typeface="Arial" pitchFamily="34" charset="-122"/>
                 <a:cs typeface="Arial" pitchFamily="34" charset="-120"/>
               </a:rPr>
-              <a:t>QUESTION 1 OF 9</a:t>
+              <a:t>QUESTION 1 OF 7</a:t>
             </a:r>
             <a:endParaRPr lang="en-US" sz="1300" dirty="0"/>
           </a:p>
@@ -2919,7 +2021,7 @@
                 <a:ea typeface="Arial" pitchFamily="34" charset="-122"/>
                 <a:cs typeface="Arial" pitchFamily="34" charset="-120"/>
               </a:rPr>
-              <a:t>A matatu travelling in the opposite direction passes your bus on the Nakuru–Nairobi highway, and the driver does not change the horn at all. Which statement is an OBSERVATION (something you actually notice) rather than a guess about the cause?</a:t>
+              <a:t>In the class demonstration, a buzzer playing a steady tone is swung on a string towards the class and then away from the class. Which statement is an OBSERVATION (something you noticed) and not an explanation?</a:t>
             </a:r>
             <a:endParaRPr lang="en-US" sz="1800" dirty="0"/>
           </a:p>
@@ -3019,7 +2121,7 @@
                 <a:ea typeface="Arial" pitchFamily="34" charset="-122"/>
                 <a:cs typeface="Arial" pitchFamily="34" charset="-120"/>
               </a:rPr>
-              <a:t>The horn changes its note because the matatu is tired after a long journey.</a:t>
+              <a:t>The pitch changed because the person swinging the string pressed the buzzer differently.</a:t>
             </a:r>
             <a:endParaRPr lang="en-US" sz="1500" dirty="0"/>
           </a:p>
@@ -3119,7 +2221,7 @@
                 <a:ea typeface="Arial" pitchFamily="34" charset="-122"/>
                 <a:cs typeface="Arial" pitchFamily="34" charset="-120"/>
               </a:rPr>
-              <a:t>The driver pressed the horn harder as the matatu came closer.</a:t>
+              <a:t>The pitch changed because the buzzer's battery was getting weaker.</a:t>
             </a:r>
             <a:endParaRPr lang="en-US" sz="1500" dirty="0"/>
           </a:p>
@@ -3219,7 +2321,7 @@
                 <a:ea typeface="Arial" pitchFamily="34" charset="-122"/>
                 <a:cs typeface="Arial" pitchFamily="34" charset="-120"/>
               </a:rPr>
-              <a:t>The horn sounded higher-pitched as the matatu came towards you and lower-pitched as it moved away.</a:t>
+              <a:t>The pitch sounded higher as the buzzer came towards us and lower as it moved away.</a:t>
             </a:r>
             <a:endParaRPr lang="en-US" sz="1500" dirty="0"/>
           </a:p>
@@ -3319,7 +2421,7 @@
                 <a:ea typeface="Arial" pitchFamily="34" charset="-122"/>
                 <a:cs typeface="Arial" pitchFamily="34" charset="-120"/>
               </a:rPr>
-              <a:t>The horn button on the matatu was faulty.</a:t>
+              <a:t>The pitch changed because the string made the buzzer vibrate faster.</a:t>
             </a:r>
             <a:endParaRPr lang="en-US" sz="1500" dirty="0"/>
           </a:p>
@@ -3429,7 +2531,7 @@
                 <a:ea typeface="Arial" pitchFamily="34" charset="-122"/>
                 <a:cs typeface="Arial" pitchFamily="34" charset="-120"/>
               </a:rPr>
-              <a:t>QUESTION 2 OF 9</a:t>
+              <a:t>QUESTION 2 OF 7</a:t>
             </a:r>
             <a:endParaRPr lang="en-US" sz="1300" dirty="0"/>
           </a:p>
@@ -3521,7 +2623,7 @@
               <a:buNone/>
             </a:pPr>
             <a:r>
-              <a:rPr lang="en-US" sz="2000" b="1" dirty="0">
+              <a:rPr lang="en-US" sz="1800" b="1" dirty="0">
                 <a:solidFill>
                   <a:srgbClr val="FFFFFF"/>
                 </a:solidFill>
@@ -3529,9 +2631,9 @@
                 <a:ea typeface="Arial" pitchFamily="34" charset="-122"/>
                 <a:cs typeface="Arial" pitchFamily="34" charset="-120"/>
               </a:rPr>
-              <a:t>On the PREDICT card, the prompt 'What did you NOTICE?' asks for a fact about the bus journey. Which entry is a NOTICE and not a guess about the cause?</a:t>
-            </a:r>
-            <a:endParaRPr lang="en-US" sz="2000" dirty="0"/>
+              <a:t>A student travelling by bus from Nakuru to Nairobi enters the long Kabete underpass while the radio is tuned to Classic 105 (FM, 105.2 MHz). What did the student notice about the radio signals in the underpass?</a:t>
+            </a:r>
+            <a:endParaRPr lang="en-US" sz="1800" dirty="0"/>
           </a:p>
         </p:txBody>
       </p:sp>
@@ -3621,7 +2723,7 @@
               <a:buNone/>
             </a:pPr>
             <a:r>
-              <a:rPr lang="en-US" sz="1300" dirty="0">
+              <a:rPr lang="en-US" sz="1700" dirty="0">
                 <a:solidFill>
                   <a:srgbClr val="FFFFFF"/>
                 </a:solidFill>
@@ -3629,9 +2731,9 @@
                 <a:ea typeface="Arial" pitchFamily="34" charset="-122"/>
                 <a:cs typeface="Arial" pitchFamily="34" charset="-120"/>
               </a:rPr>
-              <a:t>The radio receiver was faulty.</a:t>
-            </a:r>
-            <a:endParaRPr lang="en-US" sz="1300" dirty="0"/>
+              <a:t>The AM signal cut out, but the FM signal stayed audible.</a:t>
+            </a:r>
+            <a:endParaRPr lang="en-US" sz="1700" dirty="0"/>
           </a:p>
         </p:txBody>
       </p:sp>
@@ -3721,7 +2823,7 @@
               <a:buNone/>
             </a:pPr>
             <a:r>
-              <a:rPr lang="en-US" sz="1300" dirty="0">
+              <a:rPr lang="en-US" sz="1700" dirty="0">
                 <a:solidFill>
                   <a:srgbClr val="FFFFFF"/>
                 </a:solidFill>
@@ -3729,9 +2831,9 @@
                 <a:ea typeface="Arial" pitchFamily="34" charset="-122"/>
                 <a:cs typeface="Arial" pitchFamily="34" charset="-120"/>
               </a:rPr>
-              <a:t>Classic 105 has a weaker transmitter than the AM station.</a:t>
-            </a:r>
-            <a:endParaRPr lang="en-US" sz="1300" dirty="0"/>
+              <a:t>Both the FM and AM signals cut out completely.</a:t>
+            </a:r>
+            <a:endParaRPr lang="en-US" sz="1700" dirty="0"/>
           </a:p>
         </p:txBody>
       </p:sp>
@@ -3821,7 +2923,7 @@
               <a:buNone/>
             </a:pPr>
             <a:r>
-              <a:rPr lang="en-US" sz="1300" dirty="0">
+              <a:rPr lang="en-US" sz="1700" dirty="0">
                 <a:solidFill>
                   <a:srgbClr val="FFFFFF"/>
                 </a:solidFill>
@@ -3829,9 +2931,9 @@
                 <a:ea typeface="Arial" pitchFamily="34" charset="-122"/>
                 <a:cs typeface="Arial" pitchFamily="34" charset="-120"/>
               </a:rPr>
-              <a:t>On entering the Kabete underpass, the FM signal (Classic 105, 105.2 MHz) cut out almost completely while the AM signal stayed audible.</a:t>
-            </a:r>
-            <a:endParaRPr lang="en-US" sz="1300" dirty="0"/>
+              <a:t>The FM signal cut out almost completely, but the AM signal stayed audible.</a:t>
+            </a:r>
+            <a:endParaRPr lang="en-US" sz="1700" dirty="0"/>
           </a:p>
         </p:txBody>
       </p:sp>
@@ -3921,7 +3023,7 @@
               <a:buNone/>
             </a:pPr>
             <a:r>
-              <a:rPr lang="en-US" sz="1300" dirty="0">
+              <a:rPr lang="en-US" sz="1700" dirty="0">
                 <a:solidFill>
                   <a:srgbClr val="FFFFFF"/>
                 </a:solidFill>
@@ -3929,9 +3031,9 @@
                 <a:ea typeface="Arial" pitchFamily="34" charset="-122"/>
                 <a:cs typeface="Arial" pitchFamily="34" charset="-120"/>
               </a:rPr>
-              <a:t>AM waves are stronger than FM waves.</a:t>
-            </a:r>
-            <a:endParaRPr lang="en-US" sz="1300" dirty="0"/>
+              <a:t>The FM signal became louder and the AM signal stayed the same.</a:t>
+            </a:r>
+            <a:endParaRPr lang="en-US" sz="1700" dirty="0"/>
           </a:p>
         </p:txBody>
       </p:sp>
@@ -4039,7 +3141,7 @@
                 <a:ea typeface="Arial" pitchFamily="34" charset="-122"/>
                 <a:cs typeface="Arial" pitchFamily="34" charset="-120"/>
               </a:rPr>
-              <a:t>QUESTION 3 OF 9</a:t>
+              <a:t>QUESTION 3 OF 7</a:t>
             </a:r>
             <a:endParaRPr lang="en-US" sz="1300" dirty="0"/>
           </a:p>
@@ -4139,7 +3241,7 @@
                 <a:ea typeface="Arial" pitchFamily="34" charset="-122"/>
                 <a:cs typeface="Arial" pitchFamily="34" charset="-120"/>
               </a:rPr>
-              <a:t>At Station A you use the PhET Sound simulation, first moving a listener past a stationary source and then moving the source past a stationary listener. What should you write in your observation table for each set-up?</a:t>
+              <a:t>At Station A, students use the PhET 'Sound' simulation. They move a listener while the source stays still, then move the source while the listener stays still. Which two things do they record in their observation table for each set-up?</a:t>
             </a:r>
             <a:endParaRPr lang="en-US" sz="1800" dirty="0"/>
           </a:p>
@@ -4231,7 +3333,7 @@
               <a:buNone/>
             </a:pPr>
             <a:r>
-              <a:rPr lang="en-US" sz="1700" dirty="0">
+              <a:rPr lang="en-US" sz="1500" dirty="0">
                 <a:solidFill>
                   <a:srgbClr val="FFFFFF"/>
                 </a:solidFill>
@@ -4239,9 +3341,9 @@
                 <a:ea typeface="Arial" pitchFamily="34" charset="-122"/>
                 <a:cs typeface="Arial" pitchFamily="34" charset="-120"/>
               </a:rPr>
-              <a:t>The speed of a matatu on the highway</a:t>
-            </a:r>
-            <a:endParaRPr lang="en-US" sz="1700" dirty="0"/>
+              <a:t>The wavelength of the FM signal and the width of the tunnel.</a:t>
+            </a:r>
+            <a:endParaRPr lang="en-US" sz="1500" dirty="0"/>
           </a:p>
         </p:txBody>
       </p:sp>
@@ -4331,7 +3433,7 @@
               <a:buNone/>
             </a:pPr>
             <a:r>
-              <a:rPr lang="en-US" sz="1700" dirty="0">
+              <a:rPr lang="en-US" sz="1500" dirty="0">
                 <a:solidFill>
                   <a:srgbClr val="FFFFFF"/>
                 </a:solidFill>
@@ -4339,9 +3441,9 @@
                 <a:ea typeface="Arial" pitchFamily="34" charset="-122"/>
                 <a:cs typeface="Arial" pitchFamily="34" charset="-120"/>
               </a:rPr>
-              <a:t>The perceived pitch (higher, lower or same) for that set-up</a:t>
-            </a:r>
-            <a:endParaRPr lang="en-US" sz="1700" dirty="0"/>
+              <a:t>The name of the wave and the colour of the wave in the simulation.</a:t>
+            </a:r>
+            <a:endParaRPr lang="en-US" sz="1500" dirty="0"/>
           </a:p>
         </p:txBody>
       </p:sp>
@@ -4431,7 +3533,7 @@
               <a:buNone/>
             </a:pPr>
             <a:r>
-              <a:rPr lang="en-US" sz="1700" dirty="0">
+              <a:rPr lang="en-US" sz="1500" dirty="0">
                 <a:solidFill>
                   <a:srgbClr val="FFFFFF"/>
                 </a:solidFill>
@@ -4439,9 +3541,9 @@
                 <a:ea typeface="Arial" pitchFamily="34" charset="-122"/>
                 <a:cs typeface="Arial" pitchFamily="34" charset="-120"/>
               </a:rPr>
-              <a:t>The reason why the pitch changes</a:t>
-            </a:r>
-            <a:endParaRPr lang="en-US" sz="1700" dirty="0"/>
+              <a:t>The temperature of the room and the loudness of the speaker.</a:t>
+            </a:r>
+            <a:endParaRPr lang="en-US" sz="1500" dirty="0"/>
           </a:p>
         </p:txBody>
       </p:sp>
@@ -4531,7 +3633,7 @@
               <a:buNone/>
             </a:pPr>
             <a:r>
-              <a:rPr lang="en-US" sz="1700" dirty="0">
+              <a:rPr lang="en-US" sz="1500" dirty="0">
                 <a:solidFill>
                   <a:srgbClr val="FFFFFF"/>
                 </a:solidFill>
@@ -4539,9 +3641,9 @@
                 <a:ea typeface="Arial" pitchFamily="34" charset="-122"/>
                 <a:cs typeface="Arial" pitchFamily="34" charset="-120"/>
               </a:rPr>
-              <a:t>The name of the scientific effect that causes the change</a:t>
-            </a:r>
-            <a:endParaRPr lang="en-US" sz="1700" dirty="0"/>
+              <a:t>The frequency setting and whether the pitch is heard as higher, lower or the same.</a:t>
+            </a:r>
+            <a:endParaRPr lang="en-US" sz="1500" dirty="0"/>
           </a:p>
         </p:txBody>
       </p:sp>
@@ -4649,7 +3751,7 @@
                 <a:ea typeface="Arial" pitchFamily="34" charset="-122"/>
                 <a:cs typeface="Arial" pitchFamily="34" charset="-120"/>
               </a:rPr>
-              <a:t>QUESTION 4 OF 9</a:t>
+              <a:t>QUESTION 4 OF 7</a:t>
             </a:r>
             <a:endParaRPr lang="en-US" sz="1300" dirty="0"/>
           </a:p>
@@ -4741,7 +3843,7 @@
               <a:buNone/>
             </a:pPr>
             <a:r>
-              <a:rPr lang="en-US" sz="1800" b="1" dirty="0">
+              <a:rPr lang="en-US" sz="1600" b="1" dirty="0">
                 <a:solidFill>
                   <a:srgbClr val="FFFFFF"/>
                 </a:solidFill>
@@ -4749,9 +3851,9 @@
                 <a:ea typeface="Arial" pitchFamily="34" charset="-122"/>
                 <a:cs typeface="Arial" pitchFamily="34" charset="-120"/>
               </a:rPr>
-              <a:t>The Station B card shows the Kabete tunnel drawn to scale. The tunnel is about 8 m wide, the FM (105.2 MHz) wavelength is about 2.9 m and the AM wavelength is about 300 m. Which statement correctly reads these numbers?</a:t>
-            </a:r>
-            <a:endParaRPr lang="en-US" sz="1800" dirty="0"/>
+              <a:t>A Diagram Analysis Card shows a cross-section of the Kabete tunnel, drawn to scale. The tunnel is about 8 m wide. The FM wavelength (105.2 MHz) is about 2.9 m and the AM wavelength is about 300 m. Which statement correctly compares these measurements? (Only compare the numbers; do not explain anything yet.)</a:t>
+            </a:r>
+            <a:endParaRPr lang="en-US" sz="1600" dirty="0"/>
           </a:p>
         </p:txBody>
       </p:sp>
@@ -4849,7 +3951,7 @@
                 <a:ea typeface="Arial" pitchFamily="34" charset="-122"/>
                 <a:cs typeface="Arial" pitchFamily="34" charset="-120"/>
               </a:rPr>
-              <a:t>The AM wavelength is about 300 m, which is much longer than the tunnel width of about 8 m, while the FM wavelength of about 2.9 m is shorter than the tunnel width.</a:t>
+              <a:t>The FM wavelength is smaller than the tunnel width, but the AM wavelength is much larger than the tunnel width.</a:t>
             </a:r>
             <a:endParaRPr lang="en-US" sz="1300" dirty="0"/>
           </a:p>
@@ -4949,7 +4051,7 @@
                 <a:ea typeface="Arial" pitchFamily="34" charset="-122"/>
                 <a:cs typeface="Arial" pitchFamily="34" charset="-120"/>
               </a:rPr>
-              <a:t>Both the FM and the AM wavelengths are shorter than the tunnel width.</a:t>
+              <a:t>The FM wavelength is about 300 m and the AM wavelength is about 2.9 m.</a:t>
             </a:r>
             <a:endParaRPr lang="en-US" sz="1300" dirty="0"/>
           </a:p>
@@ -5049,7 +4151,7 @@
                 <a:ea typeface="Arial" pitchFamily="34" charset="-122"/>
                 <a:cs typeface="Arial" pitchFamily="34" charset="-120"/>
               </a:rPr>
-              <a:t>The AM and FM wavelengths are about the same size as each other.</a:t>
+              <a:t>Both wavelengths are larger than the tunnel width.</a:t>
             </a:r>
             <a:endParaRPr lang="en-US" sz="1300" dirty="0"/>
           </a:p>
@@ -5149,7 +4251,7 @@
                 <a:ea typeface="Arial" pitchFamily="34" charset="-122"/>
                 <a:cs typeface="Arial" pitchFamily="34" charset="-120"/>
               </a:rPr>
-              <a:t>The FM wavelength is longer than the tunnel width, and the AM wavelength is shorter than the tunnel width.</a:t>
+              <a:t>Both wavelengths are smaller than the tunnel width.</a:t>
             </a:r>
             <a:endParaRPr lang="en-US" sz="1300" dirty="0"/>
           </a:p>
@@ -5259,7 +4361,7 @@
                 <a:ea typeface="Arial" pitchFamily="34" charset="-122"/>
                 <a:cs typeface="Arial" pitchFamily="34" charset="-120"/>
               </a:rPr>
-              <a:t>QUESTION 5 OF 9</a:t>
+              <a:t>QUESTION 5 OF 7</a:t>
             </a:r>
             <a:endParaRPr lang="en-US" sz="1300" dirty="0"/>
           </a:p>
@@ -5320,7 +4422,7 @@
                 <a:ea typeface="Arial" pitchFamily="34" charset="-122"/>
                 <a:cs typeface="Arial" pitchFamily="34" charset="-120"/>
               </a:rPr>
-              <a:t>Use after: Observe phase</a:t>
+              <a:t>Use after: Explain phase</a:t>
             </a:r>
             <a:endParaRPr lang="en-US" sz="1100" dirty="0"/>
           </a:p>
@@ -5359,7 +4461,7 @@
                 <a:ea typeface="Arial" pitchFamily="34" charset="-122"/>
                 <a:cs typeface="Arial" pitchFamily="34" charset="-120"/>
               </a:rPr>
-              <a:t>During the 'WHAT WE SAW' debrief, which sticky-note entry is a specific, measurable OBSERVATION that could go in the EVIDENCE column?</a:t>
+              <a:t>After the stations and the group task, a student asks: 'So do we now fully know why FM cuts out in the tunnel but AM does not?' What is the best answer at this point in Lesson 1?</a:t>
             </a:r>
             <a:endParaRPr lang="en-US" sz="2000" dirty="0"/>
           </a:p>
@@ -5451,7 +4553,7 @@
               <a:buNone/>
             </a:pPr>
             <a:r>
-              <a:rPr lang="en-US" sz="1700" dirty="0">
+              <a:rPr lang="en-US" sz="1500" dirty="0">
                 <a:solidFill>
                   <a:srgbClr val="FFFFFF"/>
                 </a:solidFill>
@@ -5459,9 +4561,9 @@
                 <a:ea typeface="Arial" pitchFamily="34" charset="-122"/>
                 <a:cs typeface="Arial" pitchFamily="34" charset="-120"/>
               </a:rPr>
-              <a:t>The matatu horn is broken.</a:t>
-            </a:r>
-            <a:endParaRPr lang="en-US" sz="1700" dirty="0"/>
+              <a:t>Not yet. We have gathered observations and first ideas, and we will test them in the coming lessons.</a:t>
+            </a:r>
+            <a:endParaRPr lang="en-US" sz="1500" dirty="0"/>
           </a:p>
         </p:txBody>
       </p:sp>
@@ -5551,7 +4653,7 @@
               <a:buNone/>
             </a:pPr>
             <a:r>
-              <a:rPr lang="en-US" sz="1700" dirty="0">
+              <a:rPr lang="en-US" sz="1500" dirty="0">
                 <a:solidFill>
                   <a:srgbClr val="FFFFFF"/>
                 </a:solidFill>
@@ -5559,9 +4661,9 @@
                 <a:ea typeface="Arial" pitchFamily="34" charset="-122"/>
                 <a:cs typeface="Arial" pitchFamily="34" charset="-120"/>
               </a:rPr>
-              <a:t>FM wavelength is about 3 m and the tunnel is about 8 m wide.</a:t>
-            </a:r>
-            <a:endParaRPr lang="en-US" sz="1700" dirty="0"/>
+              <a:t>Yes. The PhET simulation has already explained it completely.</a:t>
+            </a:r>
+            <a:endParaRPr lang="en-US" sz="1500" dirty="0"/>
           </a:p>
         </p:txBody>
       </p:sp>
@@ -5651,7 +4753,7 @@
               <a:buNone/>
             </a:pPr>
             <a:r>
-              <a:rPr lang="en-US" sz="1700" dirty="0">
+              <a:rPr lang="en-US" sz="1500" dirty="0">
                 <a:solidFill>
                   <a:srgbClr val="FFFFFF"/>
                 </a:solidFill>
@@ -5659,9 +4761,9 @@
                 <a:ea typeface="Arial" pitchFamily="34" charset="-122"/>
                 <a:cs typeface="Arial" pitchFamily="34" charset="-120"/>
               </a:rPr>
-              <a:t>Classic 105 is a bad radio station.</a:t>
-            </a:r>
-            <a:endParaRPr lang="en-US" sz="1700" dirty="0"/>
+              <a:t>No. Physics cannot explain radio signals in tunnels.</a:t>
+            </a:r>
+            <a:endParaRPr lang="en-US" sz="1500" dirty="0"/>
           </a:p>
         </p:txBody>
       </p:sp>
@@ -5751,7 +4853,7 @@
               <a:buNone/>
             </a:pPr>
             <a:r>
-              <a:rPr lang="en-US" sz="1700" dirty="0">
+              <a:rPr lang="en-US" sz="1500" dirty="0">
                 <a:solidFill>
                   <a:srgbClr val="FFFFFF"/>
                 </a:solidFill>
@@ -5759,9 +4861,9 @@
                 <a:ea typeface="Arial" pitchFamily="34" charset="-122"/>
                 <a:cs typeface="Arial" pitchFamily="34" charset="-120"/>
               </a:rPr>
-              <a:t>FM is blocked because the tunnel is too small.</a:t>
-            </a:r>
-            <a:endParaRPr lang="en-US" sz="1700" dirty="0"/>
+              <a:t>Yes. It is because Classic 105 has a weaker transmitter than the AM station.</a:t>
+            </a:r>
+            <a:endParaRPr lang="en-US" sz="1500" dirty="0"/>
           </a:p>
         </p:txBody>
       </p:sp>
@@ -5869,7 +4971,7 @@
                 <a:ea typeface="Arial" pitchFamily="34" charset="-122"/>
                 <a:cs typeface="Arial" pitchFamily="34" charset="-120"/>
               </a:rPr>
-              <a:t>QUESTION 6 OF 9</a:t>
+              <a:t>QUESTION 6 OF 7</a:t>
             </a:r>
             <a:endParaRPr lang="en-US" sz="1300" dirty="0"/>
           </a:p>
@@ -5930,7 +5032,7 @@
                 <a:ea typeface="Arial" pitchFamily="34" charset="-122"/>
                 <a:cs typeface="Arial" pitchFamily="34" charset="-120"/>
               </a:rPr>
-              <a:t>Use after: Explain phase</a:t>
+              <a:t>Use after: DQB phase</a:t>
             </a:r>
             <a:endParaRPr lang="en-US" sz="1100" dirty="0"/>
           </a:p>
@@ -5961,7 +5063,7 @@
               <a:buNone/>
             </a:pPr>
             <a:r>
-              <a:rPr lang="en-US" sz="2000" b="1" dirty="0">
+              <a:rPr lang="en-US" sz="1800" b="1" dirty="0">
                 <a:solidFill>
                   <a:srgbClr val="FFFFFF"/>
                 </a:solidFill>
@@ -5969,9 +5071,9 @@
                 <a:ea typeface="Arial" pitchFamily="34" charset="-122"/>
                 <a:cs typeface="Arial" pitchFamily="34" charset="-120"/>
               </a:rPr>
-              <a:t>During the gallery walk, each student places one dot sticker on the group explanation they find most convincing. Which explanation should get your dot?</a:t>
-            </a:r>
-            <a:endParaRPr lang="en-US" sz="2000" dirty="0"/>
+              <a:t>Students write questions on sticky notes for the Driving Question Board about the matatu horn and the Kabete tunnel. Which note is the best mechanistic question, one that starts with HOW or WHY and asks about a physical process?</a:t>
+            </a:r>
+            <a:endParaRPr lang="en-US" sz="1800" dirty="0"/>
           </a:p>
         </p:txBody>
       </p:sp>
@@ -6061,7 +5163,7 @@
               <a:buNone/>
             </a:pPr>
             <a:r>
-              <a:rPr lang="en-US" sz="1500" dirty="0">
+              <a:rPr lang="en-US" sz="1700" dirty="0">
                 <a:solidFill>
                   <a:srgbClr val="FFFFFF"/>
                 </a:solidFill>
@@ -6069,9 +5171,9 @@
                 <a:ea typeface="Arial" pitchFamily="34" charset="-122"/>
                 <a:cs typeface="Arial" pitchFamily="34" charset="-120"/>
               </a:rPr>
-              <a:t>The one that blames a technology fault, such as 'Classic 105 has a weaker transmitter', with no evidence</a:t>
-            </a:r>
-            <a:endParaRPr lang="en-US" sz="1500" dirty="0"/>
+              <a:t>Why does the pitch of a horn change only when the matatu is moving?</a:t>
+            </a:r>
+            <a:endParaRPr lang="en-US" sz="1700" dirty="0"/>
           </a:p>
         </p:txBody>
       </p:sp>
@@ -6161,7 +5263,7 @@
               <a:buNone/>
             </a:pPr>
             <a:r>
-              <a:rPr lang="en-US" sz="1500" dirty="0">
+              <a:rPr lang="en-US" sz="1700" dirty="0">
                 <a:solidFill>
                   <a:srgbClr val="FFFFFF"/>
                 </a:solidFill>
@@ -6169,9 +5271,9 @@
                 <a:ea typeface="Arial" pitchFamily="34" charset="-122"/>
                 <a:cs typeface="Arial" pitchFamily="34" charset="-120"/>
               </a:rPr>
-              <a:t>The one written by your best friend</a:t>
-            </a:r>
-            <a:endParaRPr lang="en-US" sz="1500" dirty="0"/>
+              <a:t>What colour was the matatu?</a:t>
+            </a:r>
+            <a:endParaRPr lang="en-US" sz="1700" dirty="0"/>
           </a:p>
         </p:txBody>
       </p:sp>
@@ -6261,7 +5363,7 @@
               <a:buNone/>
             </a:pPr>
             <a:r>
-              <a:rPr lang="en-US" sz="1500" dirty="0">
+              <a:rPr lang="en-US" sz="1700" dirty="0">
                 <a:solidFill>
                   <a:srgbClr val="FFFFFF"/>
                 </a:solidFill>
@@ -6269,9 +5371,9 @@
                 <a:ea typeface="Arial" pitchFamily="34" charset="-122"/>
                 <a:cs typeface="Arial" pitchFamily="34" charset="-120"/>
               </a:rPr>
-              <a:t>The one that is the longest</a:t>
-            </a:r>
-            <a:endParaRPr lang="en-US" sz="1500" dirty="0"/>
+              <a:t>Which radio station is the best to listen to on the bus?</a:t>
+            </a:r>
+            <a:endParaRPr lang="en-US" sz="1700" dirty="0"/>
           </a:p>
         </p:txBody>
       </p:sp>
@@ -6361,7 +5463,7 @@
               <a:buNone/>
             </a:pPr>
             <a:r>
-              <a:rPr lang="en-US" sz="1500" dirty="0">
+              <a:rPr lang="en-US" sz="1700" dirty="0">
                 <a:solidFill>
                   <a:srgbClr val="FFFFFF"/>
                 </a:solidFill>
@@ -6369,9 +5471,9 @@
                 <a:ea typeface="Arial" pitchFamily="34" charset="-122"/>
                 <a:cs typeface="Arial" pitchFamily="34" charset="-120"/>
               </a:rPr>
-              <a:t>The one that uses evidence from the stations, such as the direction of movement or a measurement</a:t>
-            </a:r>
-            <a:endParaRPr lang="en-US" sz="1500" dirty="0"/>
+              <a:t>Who owns the Classic 105 radio station?</a:t>
+            </a:r>
+            <a:endParaRPr lang="en-US" sz="1700" dirty="0"/>
           </a:p>
         </p:txBody>
       </p:sp>
@@ -6479,7 +5581,7 @@
                 <a:ea typeface="Arial" pitchFamily="34" charset="-122"/>
                 <a:cs typeface="Arial" pitchFamily="34" charset="-120"/>
               </a:rPr>
-              <a:t>QUESTION 7 OF 9</a:t>
+              <a:t>QUESTION 7 OF 7</a:t>
             </a:r>
             <a:endParaRPr lang="en-US" sz="1300" dirty="0"/>
           </a:p>
@@ -6540,7 +5642,7 @@
                 <a:ea typeface="Arial" pitchFamily="34" charset="-122"/>
                 <a:cs typeface="Arial" pitchFamily="34" charset="-120"/>
               </a:rPr>
-              <a:t>Use after: DQB phase</a:t>
+              <a:t>Use after: Model Building phase</a:t>
             </a:r>
             <a:endParaRPr lang="en-US" sz="1100" dirty="0"/>
           </a:p>
@@ -6579,7 +5681,7 @@
                 <a:ea typeface="Arial" pitchFamily="34" charset="-122"/>
                 <a:cs typeface="Arial" pitchFamily="34" charset="-120"/>
               </a:rPr>
-              <a:t>When you write a question for the Driving Question Board, which question best fits the instruction 'start with HOW or WHY, about the phenomenon, and something you cannot yet answer'?</a:t>
+              <a:t>Your teacher asks you to draw an 'Initial Wave Model' showing a wave travelling from a matatu horn to your ear and then entering a narrow tunnel. What is the main purpose of this model?</a:t>
             </a:r>
             <a:endParaRPr lang="en-US" sz="2000" dirty="0"/>
           </a:p>
@@ -6671,7 +5773,7 @@
               <a:buNone/>
             </a:pPr>
             <a:r>
-              <a:rPr lang="en-US" sz="1700" dirty="0">
+              <a:rPr lang="en-US" sz="1500" dirty="0">
                 <a:solidFill>
                   <a:srgbClr val="FFFFFF"/>
                 </a:solidFill>
@@ -6679,9 +5781,9 @@
                 <a:ea typeface="Arial" pitchFamily="34" charset="-122"/>
                 <a:cs typeface="Arial" pitchFamily="34" charset="-120"/>
               </a:rPr>
-              <a:t>Where is the Kabete underpass on the map?</a:t>
-            </a:r>
-            <a:endParaRPr lang="en-US" sz="1700" dirty="0"/>
+              <a:t>To show your current thinking so that you can revise it as you gather evidence in later lessons.</a:t>
+            </a:r>
+            <a:endParaRPr lang="en-US" sz="1500" dirty="0"/>
           </a:p>
         </p:txBody>
       </p:sp>
@@ -6771,7 +5873,7 @@
               <a:buNone/>
             </a:pPr>
             <a:r>
-              <a:rPr lang="en-US" sz="1700" dirty="0">
+              <a:rPr lang="en-US" sz="1500" dirty="0">
                 <a:solidFill>
                   <a:srgbClr val="FFFFFF"/>
                 </a:solidFill>
@@ -6779,9 +5881,9 @@
                 <a:ea typeface="Arial" pitchFamily="34" charset="-122"/>
                 <a:cs typeface="Arial" pitchFamily="34" charset="-120"/>
               </a:rPr>
-              <a:t>Is Classic 105 a good radio station?</a:t>
-            </a:r>
-            <a:endParaRPr lang="en-US" sz="1700" dirty="0"/>
+              <a:t>To get marks for drawing the correct wave shape.</a:t>
+            </a:r>
+            <a:endParaRPr lang="en-US" sz="1500" dirty="0"/>
           </a:p>
         </p:txBody>
       </p:sp>
@@ -6871,7 +5973,7 @@
               <a:buNone/>
             </a:pPr>
             <a:r>
-              <a:rPr lang="en-US" sz="1700" dirty="0">
+              <a:rPr lang="en-US" sz="1500" dirty="0">
                 <a:solidFill>
                   <a:srgbClr val="FFFFFF"/>
                 </a:solidFill>
@@ -6879,9 +5981,9 @@
                 <a:ea typeface="Arial" pitchFamily="34" charset="-122"/>
                 <a:cs typeface="Arial" pitchFamily="34" charset="-120"/>
               </a:rPr>
-              <a:t>Which Sacco owns the matatu?</a:t>
-            </a:r>
-            <a:endParaRPr lang="en-US" sz="1700" dirty="0"/>
+              <a:t>To give the final scientific explanation of the horn and the radio.</a:t>
+            </a:r>
+            <a:endParaRPr lang="en-US" sz="1500" dirty="0"/>
           </a:p>
         </p:txBody>
       </p:sp>
@@ -6971,7 +6073,7 @@
               <a:buNone/>
             </a:pPr>
             <a:r>
-              <a:rPr lang="en-US" sz="1700" dirty="0">
+              <a:rPr lang="en-US" sz="1500" dirty="0">
                 <a:solidFill>
                   <a:srgbClr val="FFFFFF"/>
                 </a:solidFill>
@@ -6979,9 +6081,9 @@
                 <a:ea typeface="Arial" pitchFamily="34" charset="-122"/>
                 <a:cs typeface="Arial" pitchFamily="34" charset="-120"/>
               </a:rPr>
-              <a:t>Why does the FM signal cut out in the tunnel while the AM signal does not?</a:t>
-            </a:r>
-            <a:endParaRPr lang="en-US" sz="1700" dirty="0"/>
+              <a:t>To show how well you can draw a matatu.</a:t>
+            </a:r>
+            <a:endParaRPr lang="en-US" sz="1500" dirty="0"/>
           </a:p>
         </p:txBody>
       </p:sp>
@@ -7038,7 +6140,7 @@
     <p:bg>
       <p:bgPr>
         <a:solidFill>
-          <a:srgbClr val="6A4C93"/>
+          <a:srgbClr val="1F3864"/>
         </a:solidFill>
       </p:bgPr>
     </p:bg>
@@ -7064,124 +6166,24 @@
         </p:nvSpPr>
         <p:spPr>
           <a:xfrm>
-            <a:off x="548640" y="365760"/>
-            <a:ext cx="6400800" cy="365760"/>
-          </a:xfrm>
-          <a:prstGeom prst="rect">
-            <a:avLst/>
-          </a:prstGeom>
-          <a:noFill/>
-          <a:ln/>
-        </p:spPr>
-        <p:txBody>
-          <a:bodyPr wrap="square" lIns="0" tIns="0" rIns="0" bIns="0" rtlCol="0" anchor="ctr"/>
-          <a:lstStyle/>
-          <a:p>
-            <a:pPr indent="0" marL="0">
-              <a:buNone/>
-            </a:pPr>
-            <a:r>
-              <a:rPr lang="en-US" sz="1300" b="1" spc="200" kern="0" dirty="0">
-                <a:solidFill>
-                  <a:srgbClr val="E0D6F0"/>
-                </a:solidFill>
-                <a:latin typeface="Arial" pitchFamily="34" charset="0"/>
-                <a:ea typeface="Arial" pitchFamily="34" charset="-122"/>
-                <a:cs typeface="Arial" pitchFamily="34" charset="-120"/>
-              </a:rPr>
-              <a:t>QUESTION 8 OF 9</a:t>
-            </a:r>
-            <a:endParaRPr lang="en-US" sz="1300" dirty="0"/>
-          </a:p>
-        </p:txBody>
-      </p:sp>
-      <p:sp>
-        <p:nvSpPr>
-          <p:cNvPr id="3" name="Shape 1"/>
-          <p:cNvSpPr/>
-          <p:nvPr/>
-        </p:nvSpPr>
-        <p:spPr>
-          <a:xfrm>
-            <a:off x="8138160" y="320040"/>
-            <a:ext cx="3474720" cy="365760"/>
-          </a:xfrm>
-          <a:prstGeom prst="roundRect">
-            <a:avLst>
-              <a:gd name="adj" fmla="val 15000"/>
-            </a:avLst>
-          </a:prstGeom>
-          <a:solidFill>
-            <a:srgbClr val="5A3F80"/>
-          </a:solidFill>
-          <a:ln/>
-        </p:spPr>
-      </p:sp>
-      <p:sp>
-        <p:nvSpPr>
-          <p:cNvPr id="4" name="Text 2"/>
-          <p:cNvSpPr/>
-          <p:nvPr/>
-        </p:nvSpPr>
-        <p:spPr>
-          <a:xfrm>
-            <a:off x="8138160" y="320040"/>
-            <a:ext cx="3474720" cy="365760"/>
-          </a:xfrm>
-          <a:prstGeom prst="rect">
-            <a:avLst/>
-          </a:prstGeom>
-          <a:noFill/>
-          <a:ln/>
-        </p:spPr>
-        <p:txBody>
-          <a:bodyPr wrap="square" lIns="0" tIns="0" rIns="0" bIns="0" rtlCol="0" anchor="ctr"/>
-          <a:lstStyle/>
-          <a:p>
-            <a:pPr algn="ctr" indent="0" marL="0">
-              <a:buNone/>
-            </a:pPr>
-            <a:r>
-              <a:rPr lang="en-US" sz="1100" i="1" dirty="0">
-                <a:solidFill>
-                  <a:srgbClr val="E0D6F0"/>
-                </a:solidFill>
-                <a:latin typeface="Arial" pitchFamily="34" charset="0"/>
-                <a:ea typeface="Arial" pitchFamily="34" charset="-122"/>
-                <a:cs typeface="Arial" pitchFamily="34" charset="-120"/>
-              </a:rPr>
-              <a:t>Use after: Model Building phase</a:t>
-            </a:r>
-            <a:endParaRPr lang="en-US" sz="1100" dirty="0"/>
-          </a:p>
-        </p:txBody>
-      </p:sp>
-      <p:sp>
-        <p:nvSpPr>
-          <p:cNvPr id="5" name="Text 3"/>
-          <p:cNvSpPr/>
-          <p:nvPr/>
-        </p:nvSpPr>
-        <p:spPr>
-          <a:xfrm>
-            <a:off x="548640" y="868680"/>
-            <a:ext cx="11064240" cy="1325880"/>
-          </a:xfrm>
-          <a:prstGeom prst="rect">
-            <a:avLst/>
-          </a:prstGeom>
-          <a:noFill/>
-          <a:ln/>
-        </p:spPr>
-        <p:txBody>
-          <a:bodyPr wrap="square" lIns="0" tIns="0" rIns="0" bIns="0" rtlCol="0" anchor="ctr"/>
-          <a:lstStyle/>
-          <a:p>
-            <a:pPr indent="0" marL="0">
-              <a:buNone/>
-            </a:pPr>
-            <a:r>
-              <a:rPr lang="en-US" sz="2000" b="1" dirty="0">
+            <a:off x="731520" y="2194560"/>
+            <a:ext cx="10698480" cy="822960"/>
+          </a:xfrm>
+          <a:prstGeom prst="rect">
+            <a:avLst/>
+          </a:prstGeom>
+          <a:noFill/>
+          <a:ln/>
+        </p:spPr>
+        <p:txBody>
+          <a:bodyPr wrap="square" lIns="0" tIns="0" rIns="0" bIns="0" rtlCol="0" anchor="ctr"/>
+          <a:lstStyle/>
+          <a:p>
+            <a:pPr indent="0" marL="0">
+              <a:buNone/>
+            </a:pPr>
+            <a:r>
+              <a:rPr lang="en-US" sz="3400" b="1" dirty="0">
                 <a:solidFill>
                   <a:srgbClr val="FFFFFF"/>
                 </a:solidFill>
@@ -7189,448 +6191,48 @@
                 <a:ea typeface="Arial" pitchFamily="34" charset="-122"/>
                 <a:cs typeface="Arial" pitchFamily="34" charset="-120"/>
               </a:rPr>
-              <a:t>You are asked to draw an 'Initial Wave Model' of a wave travelling from a matatu horn to your ear and entering a tunnel. Which statement about this model is correct?</a:t>
-            </a:r>
-            <a:endParaRPr lang="en-US" sz="2000" dirty="0"/>
-          </a:p>
-        </p:txBody>
-      </p:sp>
-      <p:sp>
-        <p:nvSpPr>
-          <p:cNvPr id="6" name="Shape 4"/>
-          <p:cNvSpPr/>
-          <p:nvPr/>
-        </p:nvSpPr>
-        <p:spPr>
-          <a:xfrm>
-            <a:off x="731520" y="2331720"/>
-            <a:ext cx="10698480" cy="777240"/>
-          </a:xfrm>
-          <a:prstGeom prst="roundRect">
-            <a:avLst>
-              <a:gd name="adj" fmla="val 9412"/>
-            </a:avLst>
-          </a:prstGeom>
-          <a:solidFill>
-            <a:srgbClr val="7C5CAA"/>
-          </a:solidFill>
-          <a:ln/>
-        </p:spPr>
-      </p:sp>
-      <p:sp>
-        <p:nvSpPr>
-          <p:cNvPr id="7" name="Text 5"/>
-          <p:cNvSpPr/>
-          <p:nvPr/>
-        </p:nvSpPr>
-        <p:spPr>
-          <a:xfrm>
-            <a:off x="914400" y="2331720"/>
-            <a:ext cx="548640" cy="777240"/>
-          </a:xfrm>
-          <a:prstGeom prst="rect">
-            <a:avLst/>
-          </a:prstGeom>
-          <a:noFill/>
-          <a:ln/>
-        </p:spPr>
-        <p:txBody>
-          <a:bodyPr wrap="square" lIns="0" tIns="0" rIns="0" bIns="0" rtlCol="0" anchor="ctr"/>
-          <a:lstStyle/>
-          <a:p>
-            <a:pPr indent="0" marL="0">
-              <a:buNone/>
-            </a:pPr>
-            <a:r>
-              <a:rPr lang="en-US" sz="1800" b="1" dirty="0">
-                <a:solidFill>
-                  <a:srgbClr val="FFFFFF"/>
-                </a:solidFill>
-                <a:latin typeface="Arial" pitchFamily="34" charset="0"/>
-                <a:ea typeface="Arial" pitchFamily="34" charset="-122"/>
-                <a:cs typeface="Arial" pitchFamily="34" charset="-120"/>
-              </a:rPr>
-              <a:t>A</a:t>
+              <a:t>All done</a:t>
+            </a:r>
+            <a:endParaRPr lang="en-US" sz="3400" dirty="0"/>
+          </a:p>
+        </p:txBody>
+      </p:sp>
+      <p:sp>
+        <p:nvSpPr>
+          <p:cNvPr id="3" name="Text 1"/>
+          <p:cNvSpPr/>
+          <p:nvPr/>
+        </p:nvSpPr>
+        <p:spPr>
+          <a:xfrm>
+            <a:off x="731520" y="3108960"/>
+            <a:ext cx="10698480" cy="731520"/>
+          </a:xfrm>
+          <a:prstGeom prst="rect">
+            <a:avLst/>
+          </a:prstGeom>
+          <a:noFill/>
+          <a:ln/>
+        </p:spPr>
+        <p:txBody>
+          <a:bodyPr wrap="square" lIns="0" tIns="0" rIns="0" bIns="0" rtlCol="0" anchor="ctr"/>
+          <a:lstStyle/>
+          <a:p>
+            <a:pPr indent="0" marL="0">
+              <a:buNone/>
+            </a:pPr>
+            <a:r>
+              <a:rPr lang="en-US" sz="1800" dirty="0">
+                <a:solidFill>
+                  <a:srgbClr val="D9EEF1"/>
+                </a:solidFill>
+                <a:latin typeface="Arial" pitchFamily="34" charset="0"/>
+                <a:ea typeface="Arial" pitchFamily="34" charset="-122"/>
+                <a:cs typeface="Arial" pitchFamily="34" charset="-120"/>
+              </a:rPr>
+              <a:t>Ask your teacher how to submit your answers today (for example, on a paper answer slip).</a:t>
             </a:r>
             <a:endParaRPr lang="en-US" sz="1800" dirty="0"/>
-          </a:p>
-        </p:txBody>
-      </p:sp>
-      <p:sp>
-        <p:nvSpPr>
-          <p:cNvPr id="8" name="Text 6"/>
-          <p:cNvSpPr/>
-          <p:nvPr/>
-        </p:nvSpPr>
-        <p:spPr>
-          <a:xfrm>
-            <a:off x="1554480" y="2331720"/>
-            <a:ext cx="9692640" cy="777240"/>
-          </a:xfrm>
-          <a:prstGeom prst="rect">
-            <a:avLst/>
-          </a:prstGeom>
-          <a:noFill/>
-          <a:ln/>
-        </p:spPr>
-        <p:txBody>
-          <a:bodyPr wrap="square" lIns="0" tIns="0" rIns="0" bIns="0" rtlCol="0" anchor="ctr"/>
-          <a:lstStyle/>
-          <a:p>
-            <a:pPr indent="0" marL="0">
-              <a:buNone/>
-            </a:pPr>
-            <a:r>
-              <a:rPr lang="en-US" sz="1300" dirty="0">
-                <a:solidFill>
-                  <a:srgbClr val="FFFFFF"/>
-                </a:solidFill>
-                <a:latin typeface="Arial" pitchFamily="34" charset="0"/>
-                <a:ea typeface="Arial" pitchFamily="34" charset="-122"/>
-                <a:cs typeface="Arial" pitchFamily="34" charset="-120"/>
-              </a:rPr>
-              <a:t>It only needs to show your current thinking, with labels and arrows, because you will revise it in later lessons.</a:t>
-            </a:r>
-            <a:endParaRPr lang="en-US" sz="1300" dirty="0"/>
-          </a:p>
-        </p:txBody>
-      </p:sp>
-      <p:sp>
-        <p:nvSpPr>
-          <p:cNvPr id="9" name="Shape 7"/>
-          <p:cNvSpPr/>
-          <p:nvPr/>
-        </p:nvSpPr>
-        <p:spPr>
-          <a:xfrm>
-            <a:off x="731520" y="3246120"/>
-            <a:ext cx="10698480" cy="777240"/>
-          </a:xfrm>
-          <a:prstGeom prst="roundRect">
-            <a:avLst>
-              <a:gd name="adj" fmla="val 9412"/>
-            </a:avLst>
-          </a:prstGeom>
-          <a:solidFill>
-            <a:srgbClr val="7C5CAA"/>
-          </a:solidFill>
-          <a:ln/>
-        </p:spPr>
-      </p:sp>
-      <p:sp>
-        <p:nvSpPr>
-          <p:cNvPr id="10" name="Text 8"/>
-          <p:cNvSpPr/>
-          <p:nvPr/>
-        </p:nvSpPr>
-        <p:spPr>
-          <a:xfrm>
-            <a:off x="914400" y="3246120"/>
-            <a:ext cx="548640" cy="777240"/>
-          </a:xfrm>
-          <a:prstGeom prst="rect">
-            <a:avLst/>
-          </a:prstGeom>
-          <a:noFill/>
-          <a:ln/>
-        </p:spPr>
-        <p:txBody>
-          <a:bodyPr wrap="square" lIns="0" tIns="0" rIns="0" bIns="0" rtlCol="0" anchor="ctr"/>
-          <a:lstStyle/>
-          <a:p>
-            <a:pPr indent="0" marL="0">
-              <a:buNone/>
-            </a:pPr>
-            <a:r>
-              <a:rPr lang="en-US" sz="1800" b="1" dirty="0">
-                <a:solidFill>
-                  <a:srgbClr val="FFFFFF"/>
-                </a:solidFill>
-                <a:latin typeface="Arial" pitchFamily="34" charset="0"/>
-                <a:ea typeface="Arial" pitchFamily="34" charset="-122"/>
-                <a:cs typeface="Arial" pitchFamily="34" charset="-120"/>
-              </a:rPr>
-              <a:t>B</a:t>
-            </a:r>
-            <a:endParaRPr lang="en-US" sz="1800" dirty="0"/>
-          </a:p>
-        </p:txBody>
-      </p:sp>
-      <p:sp>
-        <p:nvSpPr>
-          <p:cNvPr id="11" name="Text 9"/>
-          <p:cNvSpPr/>
-          <p:nvPr/>
-        </p:nvSpPr>
-        <p:spPr>
-          <a:xfrm>
-            <a:off x="1554480" y="3246120"/>
-            <a:ext cx="9692640" cy="777240"/>
-          </a:xfrm>
-          <a:prstGeom prst="rect">
-            <a:avLst/>
-          </a:prstGeom>
-          <a:noFill/>
-          <a:ln/>
-        </p:spPr>
-        <p:txBody>
-          <a:bodyPr wrap="square" lIns="0" tIns="0" rIns="0" bIns="0" rtlCol="0" anchor="ctr"/>
-          <a:lstStyle/>
-          <a:p>
-            <a:pPr indent="0" marL="0">
-              <a:buNone/>
-            </a:pPr>
-            <a:r>
-              <a:rPr lang="en-US" sz="1300" dirty="0">
-                <a:solidFill>
-                  <a:srgbClr val="FFFFFF"/>
-                </a:solidFill>
-                <a:latin typeface="Arial" pitchFamily="34" charset="0"/>
-                <a:ea typeface="Arial" pitchFamily="34" charset="-122"/>
-                <a:cs typeface="Arial" pitchFamily="34" charset="-120"/>
-              </a:rPr>
-              <a:t>The teacher will mark it wrong if the wave shape is not right.</a:t>
-            </a:r>
-            <a:endParaRPr lang="en-US" sz="1300" dirty="0"/>
-          </a:p>
-        </p:txBody>
-      </p:sp>
-      <p:sp>
-        <p:nvSpPr>
-          <p:cNvPr id="12" name="Shape 10"/>
-          <p:cNvSpPr/>
-          <p:nvPr/>
-        </p:nvSpPr>
-        <p:spPr>
-          <a:xfrm>
-            <a:off x="731520" y="4160520"/>
-            <a:ext cx="10698480" cy="777240"/>
-          </a:xfrm>
-          <a:prstGeom prst="roundRect">
-            <a:avLst>
-              <a:gd name="adj" fmla="val 9412"/>
-            </a:avLst>
-          </a:prstGeom>
-          <a:solidFill>
-            <a:srgbClr val="7C5CAA"/>
-          </a:solidFill>
-          <a:ln/>
-        </p:spPr>
-      </p:sp>
-      <p:sp>
-        <p:nvSpPr>
-          <p:cNvPr id="13" name="Text 11"/>
-          <p:cNvSpPr/>
-          <p:nvPr/>
-        </p:nvSpPr>
-        <p:spPr>
-          <a:xfrm>
-            <a:off x="914400" y="4160520"/>
-            <a:ext cx="548640" cy="777240"/>
-          </a:xfrm>
-          <a:prstGeom prst="rect">
-            <a:avLst/>
-          </a:prstGeom>
-          <a:noFill/>
-          <a:ln/>
-        </p:spPr>
-        <p:txBody>
-          <a:bodyPr wrap="square" lIns="0" tIns="0" rIns="0" bIns="0" rtlCol="0" anchor="ctr"/>
-          <a:lstStyle/>
-          <a:p>
-            <a:pPr indent="0" marL="0">
-              <a:buNone/>
-            </a:pPr>
-            <a:r>
-              <a:rPr lang="en-US" sz="1800" b="1" dirty="0">
-                <a:solidFill>
-                  <a:srgbClr val="FFFFFF"/>
-                </a:solidFill>
-                <a:latin typeface="Arial" pitchFamily="34" charset="0"/>
-                <a:ea typeface="Arial" pitchFamily="34" charset="-122"/>
-                <a:cs typeface="Arial" pitchFamily="34" charset="-120"/>
-              </a:rPr>
-              <a:t>C</a:t>
-            </a:r>
-            <a:endParaRPr lang="en-US" sz="1800" dirty="0"/>
-          </a:p>
-        </p:txBody>
-      </p:sp>
-      <p:sp>
-        <p:nvSpPr>
-          <p:cNvPr id="14" name="Text 12"/>
-          <p:cNvSpPr/>
-          <p:nvPr/>
-        </p:nvSpPr>
-        <p:spPr>
-          <a:xfrm>
-            <a:off x="1554480" y="4160520"/>
-            <a:ext cx="9692640" cy="777240"/>
-          </a:xfrm>
-          <a:prstGeom prst="rect">
-            <a:avLst/>
-          </a:prstGeom>
-          <a:noFill/>
-          <a:ln/>
-        </p:spPr>
-        <p:txBody>
-          <a:bodyPr wrap="square" lIns="0" tIns="0" rIns="0" bIns="0" rtlCol="0" anchor="ctr"/>
-          <a:lstStyle/>
-          <a:p>
-            <a:pPr indent="0" marL="0">
-              <a:buNone/>
-            </a:pPr>
-            <a:r>
-              <a:rPr lang="en-US" sz="1300" dirty="0">
-                <a:solidFill>
-                  <a:srgbClr val="FFFFFF"/>
-                </a:solidFill>
-                <a:latin typeface="Arial" pitchFamily="34" charset="0"/>
-                <a:ea typeface="Arial" pitchFamily="34" charset="-122"/>
-                <a:cs typeface="Arial" pitchFamily="34" charset="-120"/>
-              </a:rPr>
-              <a:t>It should copy the teacher's example exactly.</a:t>
-            </a:r>
-            <a:endParaRPr lang="en-US" sz="1300" dirty="0"/>
-          </a:p>
-        </p:txBody>
-      </p:sp>
-      <p:sp>
-        <p:nvSpPr>
-          <p:cNvPr id="15" name="Shape 13"/>
-          <p:cNvSpPr/>
-          <p:nvPr/>
-        </p:nvSpPr>
-        <p:spPr>
-          <a:xfrm>
-            <a:off x="731520" y="5074920"/>
-            <a:ext cx="10698480" cy="777240"/>
-          </a:xfrm>
-          <a:prstGeom prst="roundRect">
-            <a:avLst>
-              <a:gd name="adj" fmla="val 9412"/>
-            </a:avLst>
-          </a:prstGeom>
-          <a:solidFill>
-            <a:srgbClr val="7C5CAA"/>
-          </a:solidFill>
-          <a:ln/>
-        </p:spPr>
-      </p:sp>
-      <p:sp>
-        <p:nvSpPr>
-          <p:cNvPr id="16" name="Text 14"/>
-          <p:cNvSpPr/>
-          <p:nvPr/>
-        </p:nvSpPr>
-        <p:spPr>
-          <a:xfrm>
-            <a:off x="914400" y="5074920"/>
-            <a:ext cx="548640" cy="777240"/>
-          </a:xfrm>
-          <a:prstGeom prst="rect">
-            <a:avLst/>
-          </a:prstGeom>
-          <a:noFill/>
-          <a:ln/>
-        </p:spPr>
-        <p:txBody>
-          <a:bodyPr wrap="square" lIns="0" tIns="0" rIns="0" bIns="0" rtlCol="0" anchor="ctr"/>
-          <a:lstStyle/>
-          <a:p>
-            <a:pPr indent="0" marL="0">
-              <a:buNone/>
-            </a:pPr>
-            <a:r>
-              <a:rPr lang="en-US" sz="1800" b="1" dirty="0">
-                <a:solidFill>
-                  <a:srgbClr val="FFFFFF"/>
-                </a:solidFill>
-                <a:latin typeface="Arial" pitchFamily="34" charset="0"/>
-                <a:ea typeface="Arial" pitchFamily="34" charset="-122"/>
-                <a:cs typeface="Arial" pitchFamily="34" charset="-120"/>
-              </a:rPr>
-              <a:t>D</a:t>
-            </a:r>
-            <a:endParaRPr lang="en-US" sz="1800" dirty="0"/>
-          </a:p>
-        </p:txBody>
-      </p:sp>
-      <p:sp>
-        <p:nvSpPr>
-          <p:cNvPr id="17" name="Text 15"/>
-          <p:cNvSpPr/>
-          <p:nvPr/>
-        </p:nvSpPr>
-        <p:spPr>
-          <a:xfrm>
-            <a:off x="1554480" y="5074920"/>
-            <a:ext cx="9692640" cy="777240"/>
-          </a:xfrm>
-          <a:prstGeom prst="rect">
-            <a:avLst/>
-          </a:prstGeom>
-          <a:noFill/>
-          <a:ln/>
-        </p:spPr>
-        <p:txBody>
-          <a:bodyPr wrap="square" lIns="0" tIns="0" rIns="0" bIns="0" rtlCol="0" anchor="ctr"/>
-          <a:lstStyle/>
-          <a:p>
-            <a:pPr indent="0" marL="0">
-              <a:buNone/>
-            </a:pPr>
-            <a:r>
-              <a:rPr lang="en-US" sz="1300" dirty="0">
-                <a:solidFill>
-                  <a:srgbClr val="FFFFFF"/>
-                </a:solidFill>
-                <a:latin typeface="Arial" pitchFamily="34" charset="0"/>
-                <a:ea typeface="Arial" pitchFamily="34" charset="-122"/>
-                <a:cs typeface="Arial" pitchFamily="34" charset="-120"/>
-              </a:rPr>
-              <a:t>It must be completely correct before you hand it in.</a:t>
-            </a:r>
-            <a:endParaRPr lang="en-US" sz="1300" dirty="0"/>
-          </a:p>
-        </p:txBody>
-      </p:sp>
-      <p:sp>
-        <p:nvSpPr>
-          <p:cNvPr id="18" name="Text 16"/>
-          <p:cNvSpPr/>
-          <p:nvPr/>
-        </p:nvSpPr>
-        <p:spPr>
-          <a:xfrm>
-            <a:off x="11521440" y="6446520"/>
-            <a:ext cx="457200" cy="274320"/>
-          </a:xfrm>
-          <a:prstGeom prst="rect">
-            <a:avLst/>
-          </a:prstGeom>
-          <a:noFill/>
-          <a:ln/>
-        </p:spPr>
-        <p:txBody>
-          <a:bodyPr wrap="square" lIns="0" tIns="0" rIns="0" bIns="0" rtlCol="0" anchor="ctr"/>
-          <a:lstStyle/>
-          <a:p>
-            <a:pPr algn="r" indent="0" marL="0">
-              <a:buNone/>
-            </a:pPr>
-            <a:r>
-              <a:rPr lang="en-US" sz="1000" dirty="0">
-                <a:solidFill>
-                  <a:srgbClr val="C9B8E0"/>
-                </a:solidFill>
-                <a:latin typeface="Arial" pitchFamily="34" charset="0"/>
-                <a:ea typeface="Arial" pitchFamily="34" charset="-122"/>
-                <a:cs typeface="Arial" pitchFamily="34" charset="-120"/>
-              </a:rPr>
-              <a:t>9</a:t>
-            </a:r>
-            <a:endParaRPr lang="en-US" sz="1000" dirty="0"/>
           </a:p>
         </p:txBody>
       </p:sp>

--- a/data/outputs/v2/Physics/SS2.1_Properties_of_Waves/quiz/Physics_G10_SS2.1_Properties_of_Waves_L1_QuickCheck.pptx
+++ b/data/outputs/v2/Physics/SS2.1_Properties_of_Waves/quiz/Physics_G10_SS2.1_Properties_of_Waves_L1_QuickCheck.pptx
@@ -1698,7 +1698,7 @@
                 <a:ea typeface="Arial" pitchFamily="34" charset="-122"/>
                 <a:cs typeface="Arial" pitchFamily="34" charset="-120"/>
               </a:rPr>
-              <a:t>Lesson 1: Anchoring Phenomenon Launch — "The Matatu Horn and the Fading Radio"</a:t>
+              <a:t>Lesson 1: Anchoring Phenomenon: Echoes at Hell's Gate, Ngong, Kisumu and Nairobi</a:t>
             </a:r>
             <a:endParaRPr lang="en-US" sz="2000" dirty="0"/>
           </a:p>
@@ -2013,7 +2013,7 @@
               <a:buNone/>
             </a:pPr>
             <a:r>
-              <a:rPr lang="en-US" sz="1800" b="1" dirty="0">
+              <a:rPr lang="en-US" sz="2000" b="1" dirty="0">
                 <a:solidFill>
                   <a:srgbClr val="FFFFFF"/>
                 </a:solidFill>
@@ -2021,9 +2021,9 @@
                 <a:ea typeface="Arial" pitchFamily="34" charset="-122"/>
                 <a:cs typeface="Arial" pitchFamily="34" charset="-120"/>
               </a:rPr>
-              <a:t>In the class demonstration, a buzzer playing a steady tone is swung on a string towards the class and then away from the class. Which statement is an OBSERVATION (something you noticed) and not an explanation?</a:t>
-            </a:r>
-            <a:endParaRPr lang="en-US" sz="1800" dirty="0"/>
+              <a:t>Before any teaching, Wanjiru writes down what she thinks an echo is. Which of these is the best everyday description of an echo?</a:t>
+            </a:r>
+            <a:endParaRPr lang="en-US" sz="2000" dirty="0"/>
           </a:p>
         </p:txBody>
       </p:sp>
@@ -2113,7 +2113,7 @@
               <a:buNone/>
             </a:pPr>
             <a:r>
-              <a:rPr lang="en-US" sz="1500" dirty="0">
+              <a:rPr lang="en-US" sz="1700" dirty="0">
                 <a:solidFill>
                   <a:srgbClr val="FFFFFF"/>
                 </a:solidFill>
@@ -2121,9 +2121,9 @@
                 <a:ea typeface="Arial" pitchFamily="34" charset="-122"/>
                 <a:cs typeface="Arial" pitchFamily="34" charset="-120"/>
               </a:rPr>
-              <a:t>The pitch changed because the person swinging the string pressed the buzzer differently.</a:t>
-            </a:r>
-            <a:endParaRPr lang="en-US" sz="1500" dirty="0"/>
+              <a:t>A sound that stays near your mouth and gets louder</a:t>
+            </a:r>
+            <a:endParaRPr lang="en-US" sz="1700" dirty="0"/>
           </a:p>
         </p:txBody>
       </p:sp>
@@ -2213,7 +2213,7 @@
               <a:buNone/>
             </a:pPr>
             <a:r>
-              <a:rPr lang="en-US" sz="1500" dirty="0">
+              <a:rPr lang="en-US" sz="1700" dirty="0">
                 <a:solidFill>
                   <a:srgbClr val="FFFFFF"/>
                 </a:solidFill>
@@ -2221,9 +2221,9 @@
                 <a:ea typeface="Arial" pitchFamily="34" charset="-122"/>
                 <a:cs typeface="Arial" pitchFamily="34" charset="-120"/>
               </a:rPr>
-              <a:t>The pitch changed because the buzzer's battery was getting weaker.</a:t>
-            </a:r>
-            <a:endParaRPr lang="en-US" sz="1500" dirty="0"/>
+              <a:t>A brand new sound that the wall makes by itself</a:t>
+            </a:r>
+            <a:endParaRPr lang="en-US" sz="1700" dirty="0"/>
           </a:p>
         </p:txBody>
       </p:sp>
@@ -2313,7 +2313,7 @@
               <a:buNone/>
             </a:pPr>
             <a:r>
-              <a:rPr lang="en-US" sz="1500" dirty="0">
+              <a:rPr lang="en-US" sz="1700" dirty="0">
                 <a:solidFill>
                   <a:srgbClr val="FFFFFF"/>
                 </a:solidFill>
@@ -2321,9 +2321,9 @@
                 <a:ea typeface="Arial" pitchFamily="34" charset="-122"/>
                 <a:cs typeface="Arial" pitchFamily="34" charset="-120"/>
               </a:rPr>
-              <a:t>The pitch sounded higher as the buzzer came towards us and lower as it moved away.</a:t>
-            </a:r>
-            <a:endParaRPr lang="en-US" sz="1500" dirty="0"/>
+              <a:t>Your own sound coming back to you after it meets a surface</a:t>
+            </a:r>
+            <a:endParaRPr lang="en-US" sz="1700" dirty="0"/>
           </a:p>
         </p:txBody>
       </p:sp>
@@ -2413,7 +2413,7 @@
               <a:buNone/>
             </a:pPr>
             <a:r>
-              <a:rPr lang="en-US" sz="1500" dirty="0">
+              <a:rPr lang="en-US" sz="1700" dirty="0">
                 <a:solidFill>
                   <a:srgbClr val="FFFFFF"/>
                 </a:solidFill>
@@ -2421,9 +2421,9 @@
                 <a:ea typeface="Arial" pitchFamily="34" charset="-122"/>
                 <a:cs typeface="Arial" pitchFamily="34" charset="-120"/>
               </a:rPr>
-              <a:t>The pitch changed because the string made the buzzer vibrate faster.</a:t>
-            </a:r>
-            <a:endParaRPr lang="en-US" sz="1500" dirty="0"/>
+              <a:t>A sound that only the wind can make</a:t>
+            </a:r>
+            <a:endParaRPr lang="en-US" sz="1700" dirty="0"/>
           </a:p>
         </p:txBody>
       </p:sp>
@@ -2592,7 +2592,7 @@
                 <a:ea typeface="Arial" pitchFamily="34" charset="-122"/>
                 <a:cs typeface="Arial" pitchFamily="34" charset="-120"/>
               </a:rPr>
-              <a:t>Use after: Predict phase</a:t>
+              <a:t>Use after: Observe phase</a:t>
             </a:r>
             <a:endParaRPr lang="en-US" sz="1100" dirty="0"/>
           </a:p>
@@ -2631,7 +2631,7 @@
                 <a:ea typeface="Arial" pitchFamily="34" charset="-122"/>
                 <a:cs typeface="Arial" pitchFamily="34" charset="-120"/>
               </a:rPr>
-              <a:t>A student travelling by bus from Nakuru to Nairobi enters the long Kabete underpass while the radio is tuned to Classic 105 (FM, 105.2 MHz). What did the student notice about the radio signals in the underpass?</a:t>
+              <a:t>The Echo Table shows a clear echo after 0.50 s at the Hell's Gate cliff (85 m away) and a clear echo after 1.00 s at the Ngong Hills valley wall (170 m away). Which statement is supported by these observations?</a:t>
             </a:r>
             <a:endParaRPr lang="en-US" sz="1800" dirty="0"/>
           </a:p>
@@ -2731,7 +2731,7 @@
                 <a:ea typeface="Arial" pitchFamily="34" charset="-122"/>
                 <a:cs typeface="Arial" pitchFamily="34" charset="-120"/>
               </a:rPr>
-              <a:t>The AM signal cut out, but the FM signal stayed audible.</a:t>
+              <a:t>The delay was the same at both places</a:t>
             </a:r>
             <a:endParaRPr lang="en-US" sz="1700" dirty="0"/>
           </a:p>
@@ -2831,7 +2831,7 @@
                 <a:ea typeface="Arial" pitchFamily="34" charset="-122"/>
                 <a:cs typeface="Arial" pitchFamily="34" charset="-120"/>
               </a:rPr>
-              <a:t>Both the FM and AM signals cut out completely.</a:t>
+              <a:t>The echo at Ngong Hills came back after a longer delay than at Hell's Gate</a:t>
             </a:r>
             <a:endParaRPr lang="en-US" sz="1700" dirty="0"/>
           </a:p>
@@ -2931,7 +2931,7 @@
                 <a:ea typeface="Arial" pitchFamily="34" charset="-122"/>
                 <a:cs typeface="Arial" pitchFamily="34" charset="-120"/>
               </a:rPr>
-              <a:t>The FM signal cut out almost completely, but the AM signal stayed audible.</a:t>
+              <a:t>The echo at Ngong Hills came back after a shorter delay than at Hell's Gate</a:t>
             </a:r>
             <a:endParaRPr lang="en-US" sz="1700" dirty="0"/>
           </a:p>
@@ -3031,7 +3031,7 @@
                 <a:ea typeface="Arial" pitchFamily="34" charset="-122"/>
                 <a:cs typeface="Arial" pitchFamily="34" charset="-120"/>
               </a:rPr>
-              <a:t>The FM signal became louder and the AM signal stayed the same.</a:t>
+              <a:t>No echo was heard at Ngong Hills</a:t>
             </a:r>
             <a:endParaRPr lang="en-US" sz="1700" dirty="0"/>
           </a:p>
@@ -3233,7 +3233,7 @@
               <a:buNone/>
             </a:pPr>
             <a:r>
-              <a:rPr lang="en-US" sz="1800" b="1" dirty="0">
+              <a:rPr lang="en-US" sz="2000" b="1" dirty="0">
                 <a:solidFill>
                   <a:srgbClr val="FFFFFF"/>
                 </a:solidFill>
@@ -3241,9 +3241,9 @@
                 <a:ea typeface="Arial" pitchFamily="34" charset="-122"/>
                 <a:cs typeface="Arial" pitchFamily="34" charset="-120"/>
               </a:rPr>
-              <a:t>At Station A, students use the PhET 'Sound' simulation. They move a listener while the source stays still, then move the source while the listener stays still. Which two things do they record in their observation table for each set-up?</a:t>
-            </a:r>
-            <a:endParaRPr lang="en-US" sz="1800" dirty="0"/>
+              <a:t>In the Kisumu school hall, the far wall is 12 m away and the delay is 0.07 s. What did the learners record about the sound they heard there?</a:t>
+            </a:r>
+            <a:endParaRPr lang="en-US" sz="2000" dirty="0"/>
           </a:p>
         </p:txBody>
       </p:sp>
@@ -3333,7 +3333,7 @@
               <a:buNone/>
             </a:pPr>
             <a:r>
-              <a:rPr lang="en-US" sz="1500" dirty="0">
+              <a:rPr lang="en-US" sz="1700" dirty="0">
                 <a:solidFill>
                   <a:srgbClr val="FFFFFF"/>
                 </a:solidFill>
@@ -3341,9 +3341,9 @@
                 <a:ea typeface="Arial" pitchFamily="34" charset="-122"/>
                 <a:cs typeface="Arial" pitchFamily="34" charset="-120"/>
               </a:rPr>
-              <a:t>The wavelength of the FM signal and the width of the tunnel.</a:t>
-            </a:r>
-            <a:endParaRPr lang="en-US" sz="1500" dirty="0"/>
+              <a:t>A faint, clear echo after 0.50 s</a:t>
+            </a:r>
+            <a:endParaRPr lang="en-US" sz="1700" dirty="0"/>
           </a:p>
         </p:txBody>
       </p:sp>
@@ -3433,7 +3433,7 @@
               <a:buNone/>
             </a:pPr>
             <a:r>
-              <a:rPr lang="en-US" sz="1500" dirty="0">
+              <a:rPr lang="en-US" sz="1700" dirty="0">
                 <a:solidFill>
                   <a:srgbClr val="FFFFFF"/>
                 </a:solidFill>
@@ -3441,9 +3441,9 @@
                 <a:ea typeface="Arial" pitchFamily="34" charset="-122"/>
                 <a:cs typeface="Arial" pitchFamily="34" charset="-120"/>
               </a:rPr>
-              <a:t>The name of the wave and the colour of the wave in the simulation.</a:t>
-            </a:r>
-            <a:endParaRPr lang="en-US" sz="1500" dirty="0"/>
+              <a:t>No echo at all</a:t>
+            </a:r>
+            <a:endParaRPr lang="en-US" sz="1700" dirty="0"/>
           </a:p>
         </p:txBody>
       </p:sp>
@@ -3533,7 +3533,7 @@
               <a:buNone/>
             </a:pPr>
             <a:r>
-              <a:rPr lang="en-US" sz="1500" dirty="0">
+              <a:rPr lang="en-US" sz="1700" dirty="0">
                 <a:solidFill>
                   <a:srgbClr val="FFFFFF"/>
                 </a:solidFill>
@@ -3541,9 +3541,9 @@
                 <a:ea typeface="Arial" pitchFamily="34" charset="-122"/>
                 <a:cs typeface="Arial" pitchFamily="34" charset="-120"/>
               </a:rPr>
-              <a:t>The temperature of the room and the loudness of the speaker.</a:t>
-            </a:r>
-            <a:endParaRPr lang="en-US" sz="1500" dirty="0"/>
+              <a:t>A clear echo after 1.00 s</a:t>
+            </a:r>
+            <a:endParaRPr lang="en-US" sz="1700" dirty="0"/>
           </a:p>
         </p:txBody>
       </p:sp>
@@ -3633,7 +3633,7 @@
               <a:buNone/>
             </a:pPr>
             <a:r>
-              <a:rPr lang="en-US" sz="1500" dirty="0">
+              <a:rPr lang="en-US" sz="1700" dirty="0">
                 <a:solidFill>
                   <a:srgbClr val="FFFFFF"/>
                 </a:solidFill>
@@ -3641,9 +3641,9 @@
                 <a:ea typeface="Arial" pitchFamily="34" charset="-122"/>
                 <a:cs typeface="Arial" pitchFamily="34" charset="-120"/>
               </a:rPr>
-              <a:t>The frequency setting and whether the pitch is heard as higher, lower or the same.</a:t>
-            </a:r>
-            <a:endParaRPr lang="en-US" sz="1500" dirty="0"/>
+              <a:t>A loud, muddy and drawn-out sound</a:t>
+            </a:r>
+            <a:endParaRPr lang="en-US" sz="1700" dirty="0"/>
           </a:p>
         </p:txBody>
       </p:sp>
@@ -3843,7 +3843,7 @@
               <a:buNone/>
             </a:pPr>
             <a:r>
-              <a:rPr lang="en-US" sz="1600" b="1" dirty="0">
+              <a:rPr lang="en-US" sz="2000" b="1" dirty="0">
                 <a:solidFill>
                   <a:srgbClr val="FFFFFF"/>
                 </a:solidFill>
@@ -3851,9 +3851,9 @@
                 <a:ea typeface="Arial" pitchFamily="34" charset="-122"/>
                 <a:cs typeface="Arial" pitchFamily="34" charset="-120"/>
               </a:rPr>
-              <a:t>A Diagram Analysis Card shows a cross-section of the Kabete tunnel, drawn to scale. The tunnel is about 8 m wide. The FM wavelength (105.2 MHz) is about 2.9 m and the AM wavelength is about 300 m. Which statement correctly compares these measurements? (Only compare the numbers; do not explain anything yet.)</a:t>
-            </a:r>
-            <a:endParaRPr lang="en-US" sz="1600" dirty="0"/>
+              <a:t>Learners recorded what they heard at four sites: Hell's Gate cliff, Ngong Hills valley wall, Kisumu school hall and Nairobi school open grounds. Which two sites gave a clear echo?</a:t>
+            </a:r>
+            <a:endParaRPr lang="en-US" sz="2000" dirty="0"/>
           </a:p>
         </p:txBody>
       </p:sp>
@@ -3943,7 +3943,7 @@
               <a:buNone/>
             </a:pPr>
             <a:r>
-              <a:rPr lang="en-US" sz="1300" dirty="0">
+              <a:rPr lang="en-US" sz="1700" dirty="0">
                 <a:solidFill>
                   <a:srgbClr val="FFFFFF"/>
                 </a:solidFill>
@@ -3951,9 +3951,9 @@
                 <a:ea typeface="Arial" pitchFamily="34" charset="-122"/>
                 <a:cs typeface="Arial" pitchFamily="34" charset="-120"/>
               </a:rPr>
-              <a:t>The FM wavelength is smaller than the tunnel width, but the AM wavelength is much larger than the tunnel width.</a:t>
-            </a:r>
-            <a:endParaRPr lang="en-US" sz="1300" dirty="0"/>
+              <a:t>Kisumu school hall and Nairobi school open grounds</a:t>
+            </a:r>
+            <a:endParaRPr lang="en-US" sz="1700" dirty="0"/>
           </a:p>
         </p:txBody>
       </p:sp>
@@ -4043,7 +4043,7 @@
               <a:buNone/>
             </a:pPr>
             <a:r>
-              <a:rPr lang="en-US" sz="1300" dirty="0">
+              <a:rPr lang="en-US" sz="1700" dirty="0">
                 <a:solidFill>
                   <a:srgbClr val="FFFFFF"/>
                 </a:solidFill>
@@ -4051,9 +4051,9 @@
                 <a:ea typeface="Arial" pitchFamily="34" charset="-122"/>
                 <a:cs typeface="Arial" pitchFamily="34" charset="-120"/>
               </a:rPr>
-              <a:t>The FM wavelength is about 300 m and the AM wavelength is about 2.9 m.</a:t>
-            </a:r>
-            <a:endParaRPr lang="en-US" sz="1300" dirty="0"/>
+              <a:t>Ngong Hills valley wall and Kisumu school hall</a:t>
+            </a:r>
+            <a:endParaRPr lang="en-US" sz="1700" dirty="0"/>
           </a:p>
         </p:txBody>
       </p:sp>
@@ -4143,7 +4143,7 @@
               <a:buNone/>
             </a:pPr>
             <a:r>
-              <a:rPr lang="en-US" sz="1300" dirty="0">
+              <a:rPr lang="en-US" sz="1700" dirty="0">
                 <a:solidFill>
                   <a:srgbClr val="FFFFFF"/>
                 </a:solidFill>
@@ -4151,9 +4151,9 @@
                 <a:ea typeface="Arial" pitchFamily="34" charset="-122"/>
                 <a:cs typeface="Arial" pitchFamily="34" charset="-120"/>
               </a:rPr>
-              <a:t>Both wavelengths are larger than the tunnel width.</a:t>
-            </a:r>
-            <a:endParaRPr lang="en-US" sz="1300" dirty="0"/>
+              <a:t>Hell's Gate cliff and Nairobi school open grounds</a:t>
+            </a:r>
+            <a:endParaRPr lang="en-US" sz="1700" dirty="0"/>
           </a:p>
         </p:txBody>
       </p:sp>
@@ -4243,7 +4243,7 @@
               <a:buNone/>
             </a:pPr>
             <a:r>
-              <a:rPr lang="en-US" sz="1300" dirty="0">
+              <a:rPr lang="en-US" sz="1700" dirty="0">
                 <a:solidFill>
                   <a:srgbClr val="FFFFFF"/>
                 </a:solidFill>
@@ -4251,9 +4251,9 @@
                 <a:ea typeface="Arial" pitchFamily="34" charset="-122"/>
                 <a:cs typeface="Arial" pitchFamily="34" charset="-120"/>
               </a:rPr>
-              <a:t>Both wavelengths are smaller than the tunnel width.</a:t>
-            </a:r>
-            <a:endParaRPr lang="en-US" sz="1300" dirty="0"/>
+              <a:t>Hell's Gate cliff and Ngong Hills valley wall</a:t>
+            </a:r>
+            <a:endParaRPr lang="en-US" sz="1700" dirty="0"/>
           </a:p>
         </p:txBody>
       </p:sp>
@@ -4453,7 +4453,7 @@
               <a:buNone/>
             </a:pPr>
             <a:r>
-              <a:rPr lang="en-US" sz="2000" b="1" dirty="0">
+              <a:rPr lang="en-US" sz="1800" b="1" dirty="0">
                 <a:solidFill>
                   <a:srgbClr val="FFFFFF"/>
                 </a:solidFill>
@@ -4461,9 +4461,9 @@
                 <a:ea typeface="Arial" pitchFamily="34" charset="-122"/>
                 <a:cs typeface="Arial" pitchFamily="34" charset="-120"/>
               </a:rPr>
-              <a:t>After the stations and the group task, a student asks: 'So do we now fully know why FM cuts out in the tunnel but AM does not?' What is the best answer at this point in Lesson 1?</a:t>
-            </a:r>
-            <a:endParaRPr lang="en-US" sz="2000" dirty="0"/>
+              <a:t>In the Echo Table, the Nairobi school open grounds had no hard wall nearer than 300 m and no echo was heard. At this point in the unit, which is the most honest answer to 'Why was no echo heard there?'</a:t>
+            </a:r>
+            <a:endParaRPr lang="en-US" sz="1800" dirty="0"/>
           </a:p>
         </p:txBody>
       </p:sp>
@@ -4561,7 +4561,7 @@
                 <a:ea typeface="Arial" pitchFamily="34" charset="-122"/>
                 <a:cs typeface="Arial" pitchFamily="34" charset="-120"/>
               </a:rPr>
-              <a:t>Not yet. We have gathered observations and first ideas, and we will test them in the coming lessons.</a:t>
+              <a:t>Sound disappears when there are no walls close by</a:t>
             </a:r>
             <a:endParaRPr lang="en-US" sz="1500" dirty="0"/>
           </a:p>
@@ -4661,7 +4661,7 @@
                 <a:ea typeface="Arial" pitchFamily="34" charset="-122"/>
                 <a:cs typeface="Arial" pitchFamily="34" charset="-120"/>
               </a:rPr>
-              <a:t>Yes. The PhET simulation has already explained it completely.</a:t>
+              <a:t>The grass swallows all the sound, so nothing can return</a:t>
             </a:r>
             <a:endParaRPr lang="en-US" sz="1500" dirty="0"/>
           </a:p>
@@ -4761,7 +4761,7 @@
                 <a:ea typeface="Arial" pitchFamily="34" charset="-122"/>
                 <a:cs typeface="Arial" pitchFamily="34" charset="-120"/>
               </a:rPr>
-              <a:t>No. Physics cannot explain radio signals in tunnels.</a:t>
+              <a:t>The wind always carries the sound away on open ground</a:t>
             </a:r>
             <a:endParaRPr lang="en-US" sz="1500" dirty="0"/>
           </a:p>
@@ -4861,7 +4861,7 @@
                 <a:ea typeface="Arial" pitchFamily="34" charset="-122"/>
                 <a:cs typeface="Arial" pitchFamily="34" charset="-120"/>
               </a:rPr>
-              <a:t>Yes. It is because Classic 105 has a weaker transmitter than the AM station.</a:t>
+              <a:t>We have only recorded what was heard; the reason is still a question we will investigate</a:t>
             </a:r>
             <a:endParaRPr lang="en-US" sz="1500" dirty="0"/>
           </a:p>
@@ -5063,7 +5063,7 @@
               <a:buNone/>
             </a:pPr>
             <a:r>
-              <a:rPr lang="en-US" sz="1800" b="1" dirty="0">
+              <a:rPr lang="en-US" sz="2000" b="1" dirty="0">
                 <a:solidFill>
                   <a:srgbClr val="FFFFFF"/>
                 </a:solidFill>
@@ -5071,9 +5071,9 @@
                 <a:ea typeface="Arial" pitchFamily="34" charset="-122"/>
                 <a:cs typeface="Arial" pitchFamily="34" charset="-120"/>
               </a:rPr>
-              <a:t>Students write questions on sticky notes for the Driving Question Board about the matatu horn and the Kabete tunnel. Which note is the best mechanistic question, one that starts with HOW or WHY and asks about a physical process?</a:t>
-            </a:r>
-            <a:endParaRPr lang="en-US" sz="1800" dirty="0"/>
+              <a:t>The class is building a Driving Question Board about echoes. Which learner question is best for the board because it asks about a cause?</a:t>
+            </a:r>
+            <a:endParaRPr lang="en-US" sz="2000" dirty="0"/>
           </a:p>
         </p:txBody>
       </p:sp>
@@ -5171,7 +5171,7 @@
                 <a:ea typeface="Arial" pitchFamily="34" charset="-122"/>
                 <a:cs typeface="Arial" pitchFamily="34" charset="-120"/>
               </a:rPr>
-              <a:t>Why does the pitch of a horn change only when the matatu is moving?</a:t>
+              <a:t>Who wrote the story about the four learners?</a:t>
             </a:r>
             <a:endParaRPr lang="en-US" sz="1700" dirty="0"/>
           </a:p>
@@ -5271,7 +5271,7 @@
                 <a:ea typeface="Arial" pitchFamily="34" charset="-122"/>
                 <a:cs typeface="Arial" pitchFamily="34" charset="-120"/>
               </a:rPr>
-              <a:t>What colour was the matatu?</a:t>
+              <a:t>Why is there a delay before the echo at Hell's Gate is heard?</a:t>
             </a:r>
             <a:endParaRPr lang="en-US" sz="1700" dirty="0"/>
           </a:p>
@@ -5371,7 +5371,7 @@
                 <a:ea typeface="Arial" pitchFamily="34" charset="-122"/>
                 <a:cs typeface="Arial" pitchFamily="34" charset="-120"/>
               </a:rPr>
-              <a:t>Which radio station is the best to listen to on the bus?</a:t>
+              <a:t>In which county is Hell's Gate National Park?</a:t>
             </a:r>
             <a:endParaRPr lang="en-US" sz="1700" dirty="0"/>
           </a:p>
@@ -5471,7 +5471,7 @@
                 <a:ea typeface="Arial" pitchFamily="34" charset="-122"/>
                 <a:cs typeface="Arial" pitchFamily="34" charset="-120"/>
               </a:rPr>
-              <a:t>Who owns the Classic 105 radio station?</a:t>
+              <a:t>How many learners went on the trip to Hell's Gate?</a:t>
             </a:r>
             <a:endParaRPr lang="en-US" sz="1700" dirty="0"/>
           </a:p>
@@ -5673,7 +5673,7 @@
               <a:buNone/>
             </a:pPr>
             <a:r>
-              <a:rPr lang="en-US" sz="2000" b="1" dirty="0">
+              <a:rPr lang="en-US" sz="2300" b="1" dirty="0">
                 <a:solidFill>
                   <a:srgbClr val="FFFFFF"/>
                 </a:solidFill>
@@ -5681,9 +5681,9 @@
                 <a:ea typeface="Arial" pitchFamily="34" charset="-122"/>
                 <a:cs typeface="Arial" pitchFamily="34" charset="-120"/>
               </a:rPr>
-              <a:t>Your teacher asks you to draw an 'Initial Wave Model' showing a wave travelling from a matatu horn to your ear and then entering a narrow tunnel. What is the main purpose of this model?</a:t>
-            </a:r>
-            <a:endParaRPr lang="en-US" sz="2000" dirty="0"/>
+              <a:t>Amina is drawing her Initial Echo Model of a shout at a cliff. Which set of items should her drawing include?</a:t>
+            </a:r>
+            <a:endParaRPr lang="en-US" sz="2300" dirty="0"/>
           </a:p>
         </p:txBody>
       </p:sp>
@@ -5773,7 +5773,7 @@
               <a:buNone/>
             </a:pPr>
             <a:r>
-              <a:rPr lang="en-US" sz="1500" dirty="0">
+              <a:rPr lang="en-US" sz="1300" dirty="0">
                 <a:solidFill>
                   <a:srgbClr val="FFFFFF"/>
                 </a:solidFill>
@@ -5781,9 +5781,9 @@
                 <a:ea typeface="Arial" pitchFamily="34" charset="-122"/>
                 <a:cs typeface="Arial" pitchFamily="34" charset="-120"/>
               </a:rPr>
-              <a:t>To show your current thinking so that you can revise it as you gather evidence in later lessons.</a:t>
-            </a:r>
-            <a:endParaRPr lang="en-US" sz="1500" dirty="0"/>
+              <a:t>Only the cliff, because the cliff is the only thing that matters</a:t>
+            </a:r>
+            <a:endParaRPr lang="en-US" sz="1300" dirty="0"/>
           </a:p>
         </p:txBody>
       </p:sp>
@@ -5873,7 +5873,7 @@
               <a:buNone/>
             </a:pPr>
             <a:r>
-              <a:rPr lang="en-US" sz="1500" dirty="0">
+              <a:rPr lang="en-US" sz="1300" dirty="0">
                 <a:solidFill>
                   <a:srgbClr val="FFFFFF"/>
                 </a:solidFill>
@@ -5881,9 +5881,9 @@
                 <a:ea typeface="Arial" pitchFamily="34" charset="-122"/>
                 <a:cs typeface="Arial" pitchFamily="34" charset="-120"/>
               </a:rPr>
-              <a:t>To get marks for drawing the correct wave shape.</a:t>
-            </a:r>
-            <a:endParaRPr lang="en-US" sz="1500" dirty="0"/>
+              <a:t>The person shouting, the cliff, and arrows with labels showing what she thinks travels to the cliff and comes back</a:t>
+            </a:r>
+            <a:endParaRPr lang="en-US" sz="1300" dirty="0"/>
           </a:p>
         </p:txBody>
       </p:sp>
@@ -5973,7 +5973,7 @@
               <a:buNone/>
             </a:pPr>
             <a:r>
-              <a:rPr lang="en-US" sz="1500" dirty="0">
+              <a:rPr lang="en-US" sz="1300" dirty="0">
                 <a:solidFill>
                   <a:srgbClr val="FFFFFF"/>
                 </a:solidFill>
@@ -5981,9 +5981,9 @@
                 <a:ea typeface="Arial" pitchFamily="34" charset="-122"/>
                 <a:cs typeface="Arial" pitchFamily="34" charset="-120"/>
               </a:rPr>
-              <a:t>To give the final scientific explanation of the horn and the radio.</a:t>
-            </a:r>
-            <a:endParaRPr lang="en-US" sz="1500" dirty="0"/>
+              <a:t>Only the person shouting, because the sound stays with the speaker</a:t>
+            </a:r>
+            <a:endParaRPr lang="en-US" sz="1300" dirty="0"/>
           </a:p>
         </p:txBody>
       </p:sp>
@@ -6073,7 +6073,7 @@
               <a:buNone/>
             </a:pPr>
             <a:r>
-              <a:rPr lang="en-US" sz="1500" dirty="0">
+              <a:rPr lang="en-US" sz="1300" dirty="0">
                 <a:solidFill>
                   <a:srgbClr val="FFFFFF"/>
                 </a:solidFill>
@@ -6081,9 +6081,9 @@
                 <a:ea typeface="Arial" pitchFamily="34" charset="-122"/>
                 <a:cs typeface="Arial" pitchFamily="34" charset="-120"/>
               </a:rPr>
-              <a:t>To show how well you can draw a matatu.</a:t>
-            </a:r>
-            <a:endParaRPr lang="en-US" sz="1500" dirty="0"/>
+              <a:t>A final answer with a formula, so that nobody can say the model is wrong</a:t>
+            </a:r>
+            <a:endParaRPr lang="en-US" sz="1300" dirty="0"/>
           </a:p>
         </p:txBody>
       </p:sp>
